--- a/did测试/内容汇报1014.pptx
+++ b/did测试/内容汇报1014.pptx
@@ -234,7 +234,7 @@
             <a:fld id="{25E977C3-5D49-4AE3-94A3-4A850F718679}" type="datetimeFigureOut">
               <a:rPr lang="zh-CN" altLang="en-US" smtClean="0"/>
               <a:pPr/>
-              <a:t>2025/10/20</a:t>
+              <a:t>2025/10/21</a:t>
             </a:fld>
             <a:endParaRPr lang="zh-CN" altLang="en-US"/>
           </a:p>
@@ -3114,7 +3114,7 @@
             <a:fld id="{530820CF-B880-4189-942D-D702A7CBA730}" type="datetimeFigureOut">
               <a:rPr lang="zh-CN" altLang="en-US" smtClean="0"/>
               <a:pPr/>
-              <a:t>2025/10/20</a:t>
+              <a:t>2025/10/21</a:t>
             </a:fld>
             <a:endParaRPr lang="zh-CN" altLang="en-US"/>
           </a:p>
@@ -3284,7 +3284,7 @@
             <a:fld id="{530820CF-B880-4189-942D-D702A7CBA730}" type="datetimeFigureOut">
               <a:rPr lang="zh-CN" altLang="en-US" smtClean="0"/>
               <a:pPr/>
-              <a:t>2025/10/20</a:t>
+              <a:t>2025/10/21</a:t>
             </a:fld>
             <a:endParaRPr lang="zh-CN" altLang="en-US"/>
           </a:p>
@@ -3464,7 +3464,7 @@
             <a:fld id="{530820CF-B880-4189-942D-D702A7CBA730}" type="datetimeFigureOut">
               <a:rPr lang="zh-CN" altLang="en-US" smtClean="0"/>
               <a:pPr/>
-              <a:t>2025/10/20</a:t>
+              <a:t>2025/10/21</a:t>
             </a:fld>
             <a:endParaRPr lang="zh-CN" altLang="en-US"/>
           </a:p>
@@ -3634,7 +3634,7 @@
             <a:fld id="{530820CF-B880-4189-942D-D702A7CBA730}" type="datetimeFigureOut">
               <a:rPr lang="zh-CN" altLang="en-US" smtClean="0"/>
               <a:pPr/>
-              <a:t>2025/10/20</a:t>
+              <a:t>2025/10/21</a:t>
             </a:fld>
             <a:endParaRPr lang="zh-CN" altLang="en-US"/>
           </a:p>
@@ -3881,7 +3881,7 @@
             <a:fld id="{530820CF-B880-4189-942D-D702A7CBA730}" type="datetimeFigureOut">
               <a:rPr lang="zh-CN" altLang="en-US" smtClean="0"/>
               <a:pPr/>
-              <a:t>2025/10/20</a:t>
+              <a:t>2025/10/21</a:t>
             </a:fld>
             <a:endParaRPr lang="zh-CN" altLang="en-US"/>
           </a:p>
@@ -4168,7 +4168,7 @@
             <a:fld id="{530820CF-B880-4189-942D-D702A7CBA730}" type="datetimeFigureOut">
               <a:rPr lang="zh-CN" altLang="en-US" smtClean="0"/>
               <a:pPr/>
-              <a:t>2025/10/20</a:t>
+              <a:t>2025/10/21</a:t>
             </a:fld>
             <a:endParaRPr lang="zh-CN" altLang="en-US"/>
           </a:p>
@@ -4589,7 +4589,7 @@
             <a:fld id="{530820CF-B880-4189-942D-D702A7CBA730}" type="datetimeFigureOut">
               <a:rPr lang="zh-CN" altLang="en-US" smtClean="0"/>
               <a:pPr/>
-              <a:t>2025/10/20</a:t>
+              <a:t>2025/10/21</a:t>
             </a:fld>
             <a:endParaRPr lang="zh-CN" altLang="en-US"/>
           </a:p>
@@ -4708,7 +4708,7 @@
             <a:fld id="{530820CF-B880-4189-942D-D702A7CBA730}" type="datetimeFigureOut">
               <a:rPr lang="zh-CN" altLang="en-US" smtClean="0"/>
               <a:pPr/>
-              <a:t>2025/10/20</a:t>
+              <a:t>2025/10/21</a:t>
             </a:fld>
             <a:endParaRPr lang="zh-CN" altLang="en-US"/>
           </a:p>
@@ -4805,7 +4805,7 @@
             <a:fld id="{530820CF-B880-4189-942D-D702A7CBA730}" type="datetimeFigureOut">
               <a:rPr lang="zh-CN" altLang="en-US" smtClean="0"/>
               <a:pPr/>
-              <a:t>2025/10/20</a:t>
+              <a:t>2025/10/21</a:t>
             </a:fld>
             <a:endParaRPr lang="zh-CN" altLang="en-US"/>
           </a:p>
@@ -5082,7 +5082,7 @@
             <a:fld id="{530820CF-B880-4189-942D-D702A7CBA730}" type="datetimeFigureOut">
               <a:rPr lang="zh-CN" altLang="en-US" smtClean="0"/>
               <a:pPr/>
-              <a:t>2025/10/20</a:t>
+              <a:t>2025/10/21</a:t>
             </a:fld>
             <a:endParaRPr lang="zh-CN" altLang="en-US"/>
           </a:p>
@@ -5336,7 +5336,7 @@
             <a:fld id="{530820CF-B880-4189-942D-D702A7CBA730}" type="datetimeFigureOut">
               <a:rPr lang="zh-CN" altLang="en-US" smtClean="0"/>
               <a:pPr/>
-              <a:t>2025/10/20</a:t>
+              <a:t>2025/10/21</a:t>
             </a:fld>
             <a:endParaRPr lang="zh-CN" altLang="en-US"/>
           </a:p>
@@ -5557,7 +5557,7 @@
             <a:fld id="{530820CF-B880-4189-942D-D702A7CBA730}" type="datetimeFigureOut">
               <a:rPr lang="zh-CN" altLang="en-US" smtClean="0"/>
               <a:pPr/>
-              <a:t>2025/10/20</a:t>
+              <a:t>2025/10/21</a:t>
             </a:fld>
             <a:endParaRPr lang="zh-CN" altLang="en-US"/>
           </a:p>
@@ -12912,7 +12912,7 @@
         <p:spPr>
           <a:xfrm>
             <a:off x="432437" y="2374114"/>
-            <a:ext cx="11467083" cy="725968"/>
+            <a:ext cx="11467083" cy="1058367"/>
           </a:xfrm>
           <a:prstGeom prst="rect">
             <a:avLst/>
@@ -12971,10 +12971,44 @@
                 <a:ea typeface="宋体" panose="02010600030101010101" pitchFamily="2" charset="-122"/>
                 <a:cs typeface="Times New Roman" panose="02020603050405020304" pitchFamily="18" charset="0"/>
               </a:rPr>
-              <a:t>）的结果是类似的；语调指标在（</a:t>
-            </a:r>
-            <a:r>
-              <a:rPr lang="en-US" altLang="zh-CN" sz="1800" kern="100" dirty="0">
+              <a:t>）的结果是类似的；语调指标</a:t>
+            </a:r>
+            <a:r>
+              <a:rPr lang="zh-CN" altLang="en-US" kern="100" dirty="0">
+                <a:solidFill>
+                  <a:srgbClr val="000000"/>
+                </a:solidFill>
+                <a:latin typeface="微软雅黑" panose="020B0503020204020204" pitchFamily="34" charset="-122"/>
+                <a:ea typeface="宋体" panose="02010600030101010101" pitchFamily="2" charset="-122"/>
+                <a:cs typeface="Times New Roman" panose="02020603050405020304" pitchFamily="18" charset="0"/>
+              </a:rPr>
+              <a:t>对 </a:t>
+            </a:r>
+            <a:r>
+              <a:rPr lang="zh-CN" altLang="en-US" u="sng" kern="100" dirty="0">
+                <a:solidFill>
+                  <a:srgbClr val="000000"/>
+                </a:solidFill>
+                <a:latin typeface="微软雅黑" panose="020B0503020204020204" pitchFamily="34" charset="-122"/>
+                <a:ea typeface="宋体" panose="02010600030101010101" pitchFamily="2" charset="-122"/>
+                <a:cs typeface="Times New Roman" panose="02020603050405020304" pitchFamily="18" charset="0"/>
+              </a:rPr>
+              <a:t>原先</a:t>
+            </a:r>
+            <a:r>
+              <a:rPr lang="zh-CN" altLang="zh-CN" sz="1800" u="sng" kern="100" dirty="0">
+                <a:solidFill>
+                  <a:srgbClr val="000000"/>
+                </a:solidFill>
+                <a:effectLst/>
+                <a:latin typeface="微软雅黑" panose="020B0503020204020204" pitchFamily="34" charset="-122"/>
+                <a:ea typeface="宋体" panose="02010600030101010101" pitchFamily="2" charset="-122"/>
+                <a:cs typeface="Times New Roman" panose="02020603050405020304" pitchFamily="18" charset="0"/>
+              </a:rPr>
+              <a:t>在（</a:t>
+            </a:r>
+            <a:r>
+              <a:rPr lang="en-US" altLang="zh-CN" sz="1800" u="sng" kern="100" dirty="0">
                 <a:solidFill>
                   <a:srgbClr val="000000"/>
                 </a:solidFill>
@@ -12986,7 +13020,7 @@
               <a:t>1</a:t>
             </a:r>
             <a:r>
-              <a:rPr lang="zh-CN" altLang="zh-CN" sz="1800" kern="100" dirty="0">
+              <a:rPr lang="zh-CN" altLang="zh-CN" sz="1800" u="sng" kern="100" dirty="0">
                 <a:solidFill>
                   <a:srgbClr val="000000"/>
                 </a:solidFill>
@@ -12995,7 +13029,91 @@
                 <a:ea typeface="宋体" panose="02010600030101010101" pitchFamily="2" charset="-122"/>
                 <a:cs typeface="Times New Roman" panose="02020603050405020304" pitchFamily="18" charset="0"/>
               </a:rPr>
-              <a:t>）中显著的能耗强度、碳排强度不显著、甚至方向都不对，但在非化石能源占比方面存在某种水平的显著性（</a:t>
+              <a:t>）中显著的能耗强度、碳排强度</a:t>
+            </a:r>
+            <a:r>
+              <a:rPr lang="en-US" altLang="zh-CN" sz="1800" kern="100" dirty="0">
+                <a:solidFill>
+                  <a:srgbClr val="000000"/>
+                </a:solidFill>
+                <a:effectLst/>
+                <a:latin typeface="微软雅黑" panose="020B0503020204020204" pitchFamily="34" charset="-122"/>
+                <a:ea typeface="宋体" panose="02010600030101010101" pitchFamily="2" charset="-122"/>
+                <a:cs typeface="Times New Roman" panose="02020603050405020304" pitchFamily="18" charset="0"/>
+              </a:rPr>
+              <a:t> </a:t>
+            </a:r>
+            <a:r>
+              <a:rPr lang="zh-CN" altLang="en-US" sz="1800" kern="100" dirty="0">
+                <a:solidFill>
+                  <a:srgbClr val="000000"/>
+                </a:solidFill>
+                <a:effectLst/>
+                <a:latin typeface="微软雅黑" panose="020B0503020204020204" pitchFamily="34" charset="-122"/>
+                <a:ea typeface="宋体" panose="02010600030101010101" pitchFamily="2" charset="-122"/>
+                <a:cs typeface="Times New Roman" panose="02020603050405020304" pitchFamily="18" charset="0"/>
+              </a:rPr>
+              <a:t>反而</a:t>
+            </a:r>
+            <a:r>
+              <a:rPr lang="zh-CN" altLang="zh-CN" sz="1800" kern="100" dirty="0">
+                <a:solidFill>
+                  <a:srgbClr val="000000"/>
+                </a:solidFill>
+                <a:effectLst/>
+                <a:latin typeface="微软雅黑" panose="020B0503020204020204" pitchFamily="34" charset="-122"/>
+                <a:ea typeface="宋体" panose="02010600030101010101" pitchFamily="2" charset="-122"/>
+                <a:cs typeface="Times New Roman" panose="02020603050405020304" pitchFamily="18" charset="0"/>
+              </a:rPr>
+              <a:t>不显著、甚至方向都不对，但在</a:t>
+            </a:r>
+            <a:r>
+              <a:rPr lang="en-US" altLang="zh-CN" sz="1800" kern="100" dirty="0">
+                <a:solidFill>
+                  <a:srgbClr val="000000"/>
+                </a:solidFill>
+                <a:effectLst/>
+                <a:latin typeface="微软雅黑" panose="020B0503020204020204" pitchFamily="34" charset="-122"/>
+                <a:ea typeface="宋体" panose="02010600030101010101" pitchFamily="2" charset="-122"/>
+                <a:cs typeface="Times New Roman" panose="02020603050405020304" pitchFamily="18" charset="0"/>
+              </a:rPr>
+              <a:t> </a:t>
+            </a:r>
+            <a:r>
+              <a:rPr lang="zh-CN" altLang="zh-CN" sz="1800" u="sng" kern="100" dirty="0">
+                <a:solidFill>
+                  <a:srgbClr val="000000"/>
+                </a:solidFill>
+                <a:effectLst/>
+                <a:latin typeface="微软雅黑" panose="020B0503020204020204" pitchFamily="34" charset="-122"/>
+                <a:ea typeface="宋体" panose="02010600030101010101" pitchFamily="2" charset="-122"/>
+                <a:cs typeface="Times New Roman" panose="02020603050405020304" pitchFamily="18" charset="0"/>
+              </a:rPr>
+              <a:t>非化石能源占比</a:t>
+            </a:r>
+            <a:r>
+              <a:rPr lang="zh-CN" altLang="en-US" sz="1800" u="sng" kern="100" dirty="0">
+                <a:solidFill>
+                  <a:srgbClr val="000000"/>
+                </a:solidFill>
+                <a:effectLst/>
+                <a:latin typeface="微软雅黑" panose="020B0503020204020204" pitchFamily="34" charset="-122"/>
+                <a:ea typeface="宋体" panose="02010600030101010101" pitchFamily="2" charset="-122"/>
+                <a:cs typeface="Times New Roman" panose="02020603050405020304" pitchFamily="18" charset="0"/>
+              </a:rPr>
+              <a:t>增长率 </a:t>
+            </a:r>
+            <a:r>
+              <a:rPr lang="zh-CN" altLang="zh-CN" sz="1800" kern="100" dirty="0">
+                <a:solidFill>
+                  <a:srgbClr val="000000"/>
+                </a:solidFill>
+                <a:effectLst/>
+                <a:latin typeface="微软雅黑" panose="020B0503020204020204" pitchFamily="34" charset="-122"/>
+                <a:ea typeface="宋体" panose="02010600030101010101" pitchFamily="2" charset="-122"/>
+                <a:cs typeface="Times New Roman" panose="02020603050405020304" pitchFamily="18" charset="0"/>
+              </a:rPr>
+              <a:t>方面存在某种水平的显著性（</a:t>
             </a:r>
             <a:r>
               <a:rPr lang="zh-CN" altLang="en-US" sz="1800" kern="100" dirty="0">
@@ -13073,7 +13191,7 @@
         </p:nvSpPr>
         <p:spPr bwMode="auto">
           <a:xfrm>
-            <a:off x="367840" y="3262699"/>
+            <a:off x="339819" y="3461982"/>
             <a:ext cx="12192000" cy="457200"/>
           </a:xfrm>
           <a:prstGeom prst="rect">
@@ -13325,7 +13443,7 @@
         </p:nvSpPr>
         <p:spPr bwMode="auto">
           <a:xfrm>
-            <a:off x="5976906" y="3271482"/>
+            <a:off x="5976906" y="3440603"/>
             <a:ext cx="12192000" cy="457200"/>
           </a:xfrm>
           <a:prstGeom prst="rect">
@@ -13391,7 +13509,7 @@
               <a:tabLst/>
             </a:pPr>
             <a:r>
-              <a:rPr kumimoji="0" lang="zh-CN" altLang="zh-CN" sz="1100" b="0" i="0" u="none" strike="noStrike" cap="none" normalizeH="0" baseline="0">
+              <a:rPr kumimoji="0" lang="zh-CN" altLang="zh-CN" sz="1100" b="0" i="0" u="none" strike="noStrike" cap="none" normalizeH="0" baseline="0" dirty="0">
                 <a:ln>
                   <a:noFill/>
                 </a:ln>
@@ -13405,7 +13523,7 @@
               </a:rPr>
               <a:t>主要目标语调标准化（非化石能源占比增长率，相当的显著，但事前趋势有点不理想）</a:t>
             </a:r>
-            <a:endParaRPr kumimoji="0" lang="zh-CN" altLang="zh-CN" sz="600" b="0" i="0" u="none" strike="noStrike" cap="none" normalizeH="0" baseline="0">
+            <a:endParaRPr kumimoji="0" lang="zh-CN" altLang="zh-CN" sz="600" b="0" i="0" u="none" strike="noStrike" cap="none" normalizeH="0" baseline="0" dirty="0">
               <a:ln>
                 <a:noFill/>
               </a:ln>
@@ -13432,7 +13550,7 @@
               <a:buNone/>
               <a:tabLst/>
             </a:pPr>
-            <a:endParaRPr kumimoji="0" lang="zh-CN" altLang="zh-CN" sz="1800" b="0" i="0" u="none" strike="noStrike" cap="none" normalizeH="0" baseline="0">
+            <a:endParaRPr kumimoji="0" lang="zh-CN" altLang="zh-CN" sz="1800" b="0" i="0" u="none" strike="noStrike" cap="none" normalizeH="0" baseline="0" dirty="0">
               <a:ln>
                 <a:noFill/>
               </a:ln>
@@ -14476,7 +14594,31 @@
                 <a:ea typeface="宋体" panose="02010600030101010101" pitchFamily="2" charset="-122"/>
                 <a:cs typeface="Times New Roman" panose="02020603050405020304" pitchFamily="18" charset="0"/>
               </a:rPr>
-              <a:t>年，非化石能源消费比重达到</a:t>
+              <a:t>年，</a:t>
+            </a:r>
+            <a:r>
+              <a:rPr lang="zh-CN" altLang="zh-CN" sz="900" b="1" kern="100" dirty="0">
+                <a:solidFill>
+                  <a:srgbClr val="A6A6A6"/>
+                </a:solidFill>
+                <a:effectLst/>
+                <a:latin typeface="微软雅黑" panose="020B0503020204020204" pitchFamily="34" charset="-122"/>
+                <a:ea typeface="宋体" panose="02010600030101010101" pitchFamily="2" charset="-122"/>
+                <a:cs typeface="Times New Roman" panose="02020603050405020304" pitchFamily="18" charset="0"/>
+              </a:rPr>
+              <a:t>非化石能源消费比重</a:t>
+            </a:r>
+            <a:r>
+              <a:rPr lang="zh-CN" altLang="zh-CN" sz="900" kern="100" dirty="0">
+                <a:solidFill>
+                  <a:srgbClr val="A6A6A6"/>
+                </a:solidFill>
+                <a:effectLst/>
+                <a:latin typeface="微软雅黑" panose="020B0503020204020204" pitchFamily="34" charset="-122"/>
+                <a:ea typeface="宋体" panose="02010600030101010101" pitchFamily="2" charset="-122"/>
+                <a:cs typeface="Times New Roman" panose="02020603050405020304" pitchFamily="18" charset="0"/>
+              </a:rPr>
+              <a:t>达到</a:t>
             </a:r>
             <a:r>
               <a:rPr lang="en-US" altLang="zh-CN" sz="900" kern="100" dirty="0">
@@ -14503,7 +14645,31 @@
                 <a:ea typeface="宋体" panose="02010600030101010101" pitchFamily="2" charset="-122"/>
                 <a:cs typeface="Times New Roman" panose="02020603050405020304" pitchFamily="18" charset="0"/>
               </a:rPr>
-              <a:t>左右，单位国内生产总值能源消耗比</a:t>
+              <a:t>左右，</a:t>
+            </a:r>
+            <a:r>
+              <a:rPr lang="zh-CN" altLang="zh-CN" sz="900" b="1" kern="100" dirty="0">
+                <a:solidFill>
+                  <a:srgbClr val="A6A6A6"/>
+                </a:solidFill>
+                <a:effectLst/>
+                <a:latin typeface="微软雅黑" panose="020B0503020204020204" pitchFamily="34" charset="-122"/>
+                <a:ea typeface="宋体" panose="02010600030101010101" pitchFamily="2" charset="-122"/>
+                <a:cs typeface="Times New Roman" panose="02020603050405020304" pitchFamily="18" charset="0"/>
+              </a:rPr>
+              <a:t>单位国内生产总值能源消耗</a:t>
+            </a:r>
+            <a:r>
+              <a:rPr lang="zh-CN" altLang="zh-CN" sz="900" kern="100" dirty="0">
+                <a:solidFill>
+                  <a:srgbClr val="A6A6A6"/>
+                </a:solidFill>
+                <a:effectLst/>
+                <a:latin typeface="微软雅黑" panose="020B0503020204020204" pitchFamily="34" charset="-122"/>
+                <a:ea typeface="宋体" panose="02010600030101010101" pitchFamily="2" charset="-122"/>
+                <a:cs typeface="Times New Roman" panose="02020603050405020304" pitchFamily="18" charset="0"/>
+              </a:rPr>
+              <a:t>比</a:t>
             </a:r>
             <a:r>
               <a:rPr lang="en-US" altLang="zh-CN" sz="900" kern="100" dirty="0">
@@ -14554,7 +14720,31 @@
                 <a:ea typeface="宋体" panose="02010600030101010101" pitchFamily="2" charset="-122"/>
                 <a:cs typeface="Times New Roman" panose="02020603050405020304" pitchFamily="18" charset="0"/>
               </a:rPr>
-              <a:t>，单位国内生产总值二氧化碳排放比</a:t>
+              <a:t>，</a:t>
+            </a:r>
+            <a:r>
+              <a:rPr lang="zh-CN" altLang="zh-CN" sz="900" b="1" kern="100" dirty="0">
+                <a:solidFill>
+                  <a:srgbClr val="A6A6A6"/>
+                </a:solidFill>
+                <a:effectLst/>
+                <a:latin typeface="微软雅黑" panose="020B0503020204020204" pitchFamily="34" charset="-122"/>
+                <a:ea typeface="宋体" panose="02010600030101010101" pitchFamily="2" charset="-122"/>
+                <a:cs typeface="Times New Roman" panose="02020603050405020304" pitchFamily="18" charset="0"/>
+              </a:rPr>
+              <a:t>单位国内生产总值二氧化碳排放</a:t>
+            </a:r>
+            <a:r>
+              <a:rPr lang="zh-CN" altLang="zh-CN" sz="900" kern="100" dirty="0">
+                <a:solidFill>
+                  <a:srgbClr val="A6A6A6"/>
+                </a:solidFill>
+                <a:effectLst/>
+                <a:latin typeface="微软雅黑" panose="020B0503020204020204" pitchFamily="34" charset="-122"/>
+                <a:ea typeface="宋体" panose="02010600030101010101" pitchFamily="2" charset="-122"/>
+                <a:cs typeface="Times New Roman" panose="02020603050405020304" pitchFamily="18" charset="0"/>
+              </a:rPr>
+              <a:t>比</a:t>
             </a:r>
             <a:r>
               <a:rPr lang="en-US" altLang="zh-CN" sz="900" kern="100" dirty="0">
@@ -14664,7 +14854,31 @@
                 <a:ea typeface="宋体" panose="02010600030101010101" pitchFamily="2" charset="-122"/>
                 <a:cs typeface="Times New Roman" panose="02020603050405020304" pitchFamily="18" charset="0"/>
               </a:rPr>
-              <a:t>年，非化石能源消费比重达到</a:t>
+              <a:t>年，</a:t>
+            </a:r>
+            <a:r>
+              <a:rPr lang="zh-CN" altLang="zh-CN" sz="900" b="1" kern="100" dirty="0">
+                <a:solidFill>
+                  <a:srgbClr val="A6A6A6"/>
+                </a:solidFill>
+                <a:effectLst/>
+                <a:latin typeface="微软雅黑" panose="020B0503020204020204" pitchFamily="34" charset="-122"/>
+                <a:ea typeface="宋体" panose="02010600030101010101" pitchFamily="2" charset="-122"/>
+                <a:cs typeface="Times New Roman" panose="02020603050405020304" pitchFamily="18" charset="0"/>
+              </a:rPr>
+              <a:t>非化石能源消费比重</a:t>
+            </a:r>
+            <a:r>
+              <a:rPr lang="zh-CN" altLang="zh-CN" sz="900" kern="100" dirty="0">
+                <a:solidFill>
+                  <a:srgbClr val="A6A6A6"/>
+                </a:solidFill>
+                <a:effectLst/>
+                <a:latin typeface="微软雅黑" panose="020B0503020204020204" pitchFamily="34" charset="-122"/>
+                <a:ea typeface="宋体" panose="02010600030101010101" pitchFamily="2" charset="-122"/>
+                <a:cs typeface="Times New Roman" panose="02020603050405020304" pitchFamily="18" charset="0"/>
+              </a:rPr>
+              <a:t>达到</a:t>
             </a:r>
             <a:r>
               <a:rPr lang="en-US" altLang="zh-CN" sz="900" kern="100" dirty="0">
@@ -14691,7 +14905,31 @@
                 <a:ea typeface="宋体" panose="02010600030101010101" pitchFamily="2" charset="-122"/>
                 <a:cs typeface="Times New Roman" panose="02020603050405020304" pitchFamily="18" charset="0"/>
               </a:rPr>
-              <a:t>左右，单位国内生产总值二氧化碳排放比</a:t>
+              <a:t>左右，</a:t>
+            </a:r>
+            <a:r>
+              <a:rPr lang="zh-CN" altLang="zh-CN" sz="900" b="1" kern="100" dirty="0">
+                <a:solidFill>
+                  <a:srgbClr val="A6A6A6"/>
+                </a:solidFill>
+                <a:effectLst/>
+                <a:latin typeface="微软雅黑" panose="020B0503020204020204" pitchFamily="34" charset="-122"/>
+                <a:ea typeface="宋体" panose="02010600030101010101" pitchFamily="2" charset="-122"/>
+                <a:cs typeface="Times New Roman" panose="02020603050405020304" pitchFamily="18" charset="0"/>
+              </a:rPr>
+              <a:t>单位国内生产总值二氧化碳排放</a:t>
+            </a:r>
+            <a:r>
+              <a:rPr lang="zh-CN" altLang="zh-CN" sz="900" kern="100" dirty="0">
+                <a:solidFill>
+                  <a:srgbClr val="A6A6A6"/>
+                </a:solidFill>
+                <a:effectLst/>
+                <a:latin typeface="微软雅黑" panose="020B0503020204020204" pitchFamily="34" charset="-122"/>
+                <a:ea typeface="宋体" panose="02010600030101010101" pitchFamily="2" charset="-122"/>
+                <a:cs typeface="Times New Roman" panose="02020603050405020304" pitchFamily="18" charset="0"/>
+              </a:rPr>
+              <a:t>比</a:t>
             </a:r>
             <a:r>
               <a:rPr lang="en-US" altLang="zh-CN" sz="900" kern="100" dirty="0">
@@ -14795,14 +15033,14 @@
           <p:nvPr>
             <p:extLst>
               <p:ext uri="{D42A27DB-BD31-4B8C-83A1-F6EECF244321}">
-                <p14:modId xmlns:p14="http://schemas.microsoft.com/office/powerpoint/2010/main" val="1011911621"/>
+                <p14:modId xmlns:p14="http://schemas.microsoft.com/office/powerpoint/2010/main" val="1567394312"/>
               </p:ext>
             </p:extLst>
           </p:nvPr>
         </p:nvGraphicFramePr>
         <p:xfrm>
-          <a:off x="3911935" y="911905"/>
-          <a:ext cx="8078209" cy="5331456"/>
+          <a:off x="3911935" y="1054582"/>
+          <a:ext cx="8078209" cy="5307901"/>
         </p:xfrm>
         <a:graphic>
           <a:graphicData uri="http://schemas.openxmlformats.org/drawingml/2006/table">
@@ -14861,7 +15099,7 @@
                   </a:extLst>
                 </a:gridCol>
               </a:tblGrid>
-              <a:tr h="166608">
+              <a:tr h="0">
                 <a:tc>
                   <a:txBody>
                     <a:bodyPr/>
@@ -15124,12 +15362,38 @@
                         <a:buNone/>
                       </a:pPr>
                       <a:r>
-                        <a:rPr lang="en-US" altLang="zh-CN" sz="900" u="none" strike="noStrike">
+                        <a:rPr lang="en-US" altLang="zh-CN" sz="900" u="none" strike="noStrike" dirty="0">
                           <a:effectLst/>
                         </a:rPr>
                         <a:t>1</a:t>
                       </a:r>
-                      <a:endParaRPr lang="en-US" altLang="zh-CN" sz="900" b="0" i="0" u="none" strike="noStrike">
+                      <a:endParaRPr lang="en-US" altLang="zh-CN" sz="900" b="0" i="0" u="none" strike="noStrike" dirty="0">
+                        <a:solidFill>
+                          <a:srgbClr val="000000"/>
+                        </a:solidFill>
+                        <a:effectLst/>
+                        <a:latin typeface="等线" panose="02010600030101010101" pitchFamily="2" charset="-122"/>
+                        <a:ea typeface="等线" panose="02010600030101010101" pitchFamily="2" charset="-122"/>
+                      </a:endParaRPr>
+                    </a:p>
+                  </a:txBody>
+                  <a:tcPr marL="5893" marR="5893" marT="5893" marB="0" anchor="b"/>
+                </a:tc>
+                <a:tc>
+                  <a:txBody>
+                    <a:bodyPr/>
+                    <a:lstStyle/>
+                    <a:p>
+                      <a:pPr algn="r" fontAlgn="b">
+                        <a:buNone/>
+                      </a:pPr>
+                      <a:r>
+                        <a:rPr lang="en-US" altLang="zh-CN" sz="900" u="none" strike="noStrike" dirty="0">
+                          <a:effectLst/>
+                        </a:rPr>
+                        <a:t>1</a:t>
+                      </a:r>
+                      <a:endParaRPr lang="en-US" altLang="zh-CN" sz="900" b="0" i="0" u="none" strike="noStrike" dirty="0">
                         <a:solidFill>
                           <a:srgbClr val="000000"/>
                         </a:solidFill>
@@ -15176,38 +15440,12 @@
                         <a:buNone/>
                       </a:pPr>
                       <a:r>
-                        <a:rPr lang="en-US" altLang="zh-CN" sz="900" u="none" strike="noStrike">
+                        <a:rPr lang="en-US" altLang="zh-CN" sz="900" u="none" strike="noStrike" dirty="0">
                           <a:effectLst/>
                         </a:rPr>
                         <a:t>1</a:t>
                       </a:r>
-                      <a:endParaRPr lang="en-US" altLang="zh-CN" sz="900" b="0" i="0" u="none" strike="noStrike">
-                        <a:solidFill>
-                          <a:srgbClr val="000000"/>
-                        </a:solidFill>
-                        <a:effectLst/>
-                        <a:latin typeface="等线" panose="02010600030101010101" pitchFamily="2" charset="-122"/>
-                        <a:ea typeface="等线" panose="02010600030101010101" pitchFamily="2" charset="-122"/>
-                      </a:endParaRPr>
-                    </a:p>
-                  </a:txBody>
-                  <a:tcPr marL="5893" marR="5893" marT="5893" marB="0" anchor="b"/>
-                </a:tc>
-                <a:tc>
-                  <a:txBody>
-                    <a:bodyPr/>
-                    <a:lstStyle/>
-                    <a:p>
-                      <a:pPr algn="r" fontAlgn="b">
-                        <a:buNone/>
-                      </a:pPr>
-                      <a:r>
-                        <a:rPr lang="en-US" altLang="zh-CN" sz="900" u="none" strike="noStrike">
-                          <a:effectLst/>
-                        </a:rPr>
-                        <a:t>1</a:t>
-                      </a:r>
-                      <a:endParaRPr lang="en-US" altLang="zh-CN" sz="900" b="0" i="0" u="none" strike="noStrike">
+                      <a:endParaRPr lang="en-US" altLang="zh-CN" sz="900" b="0" i="0" u="none" strike="noStrike" dirty="0">
                         <a:solidFill>
                           <a:srgbClr val="000000"/>
                         </a:solidFill>
@@ -15313,12 +15551,12 @@
                         <a:buNone/>
                       </a:pPr>
                       <a:r>
-                        <a:rPr lang="en-US" altLang="zh-CN" sz="900" u="none" strike="noStrike">
+                        <a:rPr lang="en-US" altLang="zh-CN" sz="900" u="none" strike="noStrike" dirty="0">
                           <a:effectLst/>
                         </a:rPr>
                         <a:t>0.72</a:t>
                       </a:r>
-                      <a:endParaRPr lang="en-US" altLang="zh-CN" sz="900" b="0" i="0" u="none" strike="noStrike">
+                      <a:endParaRPr lang="en-US" altLang="zh-CN" sz="900" b="0" i="0" u="none" strike="noStrike" dirty="0">
                         <a:solidFill>
                           <a:srgbClr val="000000"/>
                         </a:solidFill>
@@ -15339,12 +15577,12 @@
                         <a:buNone/>
                       </a:pPr>
                       <a:r>
-                        <a:rPr lang="en-US" altLang="zh-CN" sz="900" u="none" strike="noStrike">
+                        <a:rPr lang="en-US" altLang="zh-CN" sz="900" u="none" strike="noStrike" dirty="0">
                           <a:effectLst/>
                         </a:rPr>
                         <a:t>1.037037037</a:t>
                       </a:r>
-                      <a:endParaRPr lang="en-US" altLang="zh-CN" sz="900" b="0" i="0" u="none" strike="noStrike">
+                      <a:endParaRPr lang="en-US" altLang="zh-CN" sz="900" b="0" i="0" u="none" strike="noStrike" dirty="0">
                         <a:solidFill>
                           <a:srgbClr val="000000"/>
                         </a:solidFill>
@@ -15502,12 +15740,38 @@
                         <a:buNone/>
                       </a:pPr>
                       <a:r>
-                        <a:rPr lang="en-US" altLang="zh-CN" sz="900" u="none" strike="noStrike">
+                        <a:rPr lang="en-US" altLang="zh-CN" sz="900" u="none" strike="noStrike" dirty="0">
                           <a:effectLst/>
                         </a:rPr>
                         <a:t>0.585</a:t>
                       </a:r>
-                      <a:endParaRPr lang="en-US" altLang="zh-CN" sz="900" b="0" i="0" u="none" strike="noStrike">
+                      <a:endParaRPr lang="en-US" altLang="zh-CN" sz="900" b="0" i="0" u="none" strike="noStrike" dirty="0">
+                        <a:solidFill>
+                          <a:srgbClr val="000000"/>
+                        </a:solidFill>
+                        <a:effectLst/>
+                        <a:latin typeface="等线" panose="02010600030101010101" pitchFamily="2" charset="-122"/>
+                        <a:ea typeface="等线" panose="02010600030101010101" pitchFamily="2" charset="-122"/>
+                      </a:endParaRPr>
+                    </a:p>
+                  </a:txBody>
+                  <a:tcPr marL="5893" marR="5893" marT="5893" marB="0" anchor="b"/>
+                </a:tc>
+                <a:tc>
+                  <a:txBody>
+                    <a:bodyPr/>
+                    <a:lstStyle/>
+                    <a:p>
+                      <a:pPr algn="r" fontAlgn="b">
+                        <a:buNone/>
+                      </a:pPr>
+                      <a:r>
+                        <a:rPr lang="en-US" altLang="zh-CN" sz="900" u="none" strike="noStrike" dirty="0">
+                          <a:effectLst/>
+                        </a:rPr>
+                        <a:t>1</a:t>
+                      </a:r>
+                      <a:endParaRPr lang="en-US" altLang="zh-CN" sz="900" b="0" i="0" u="none" strike="noStrike" dirty="0">
                         <a:solidFill>
                           <a:srgbClr val="000000"/>
                         </a:solidFill>
@@ -15554,38 +15818,12 @@
                         <a:buNone/>
                       </a:pPr>
                       <a:r>
-                        <a:rPr lang="en-US" altLang="zh-CN" sz="900" u="none" strike="noStrike">
-                          <a:effectLst/>
-                        </a:rPr>
-                        <a:t>1</a:t>
-                      </a:r>
-                      <a:endParaRPr lang="en-US" altLang="zh-CN" sz="900" b="0" i="0" u="none" strike="noStrike">
-                        <a:solidFill>
-                          <a:srgbClr val="000000"/>
-                        </a:solidFill>
-                        <a:effectLst/>
-                        <a:latin typeface="等线" panose="02010600030101010101" pitchFamily="2" charset="-122"/>
-                        <a:ea typeface="等线" panose="02010600030101010101" pitchFamily="2" charset="-122"/>
-                      </a:endParaRPr>
-                    </a:p>
-                  </a:txBody>
-                  <a:tcPr marL="5893" marR="5893" marT="5893" marB="0" anchor="b"/>
-                </a:tc>
-                <a:tc>
-                  <a:txBody>
-                    <a:bodyPr/>
-                    <a:lstStyle/>
-                    <a:p>
-                      <a:pPr algn="r" fontAlgn="b">
-                        <a:buNone/>
-                      </a:pPr>
-                      <a:r>
-                        <a:rPr lang="en-US" altLang="zh-CN" sz="900" u="none" strike="noStrike">
+                        <a:rPr lang="en-US" altLang="zh-CN" sz="900" u="none" strike="noStrike" dirty="0">
                           <a:effectLst/>
                         </a:rPr>
                         <a:t>0.64</a:t>
                       </a:r>
-                      <a:endParaRPr lang="en-US" altLang="zh-CN" sz="900" b="0" i="0" u="none" strike="noStrike">
+                      <a:endParaRPr lang="en-US" altLang="zh-CN" sz="900" b="0" i="0" u="none" strike="noStrike" dirty="0">
                         <a:solidFill>
                           <a:srgbClr val="000000"/>
                         </a:solidFill>
@@ -15691,12 +15929,12 @@
                         <a:buNone/>
                       </a:pPr>
                       <a:r>
-                        <a:rPr lang="en-US" altLang="zh-CN" sz="900" u="none" strike="noStrike">
+                        <a:rPr lang="en-US" altLang="zh-CN" sz="900" u="none" strike="noStrike" dirty="0">
                           <a:effectLst/>
                         </a:rPr>
                         <a:t>0.65</a:t>
                       </a:r>
-                      <a:endParaRPr lang="en-US" altLang="zh-CN" sz="900" b="0" i="0" u="none" strike="noStrike">
+                      <a:endParaRPr lang="en-US" altLang="zh-CN" sz="900" b="0" i="0" u="none" strike="noStrike" dirty="0">
                         <a:solidFill>
                           <a:srgbClr val="000000"/>
                         </a:solidFill>
@@ -15717,12 +15955,12 @@
                         <a:buNone/>
                       </a:pPr>
                       <a:r>
-                        <a:rPr lang="en-US" altLang="zh-CN" sz="900" u="none" strike="noStrike">
+                        <a:rPr lang="en-US" altLang="zh-CN" sz="900" u="none" strike="noStrike" dirty="0">
                           <a:effectLst/>
                         </a:rPr>
                         <a:t>1</a:t>
                       </a:r>
-                      <a:endParaRPr lang="en-US" altLang="zh-CN" sz="900" b="0" i="0" u="none" strike="noStrike">
+                      <a:endParaRPr lang="en-US" altLang="zh-CN" sz="900" b="0" i="0" u="none" strike="noStrike" dirty="0">
                         <a:solidFill>
                           <a:srgbClr val="000000"/>
                         </a:solidFill>
@@ -15880,12 +16118,38 @@
                         <a:buNone/>
                       </a:pPr>
                       <a:r>
-                        <a:rPr lang="en-US" altLang="zh-CN" sz="900" u="none" strike="noStrike">
+                        <a:rPr lang="en-US" altLang="zh-CN" sz="900" u="none" strike="noStrike" dirty="0">
                           <a:effectLst/>
                         </a:rPr>
                         <a:t>0.6</a:t>
                       </a:r>
-                      <a:endParaRPr lang="en-US" altLang="zh-CN" sz="900" b="0" i="0" u="none" strike="noStrike">
+                      <a:endParaRPr lang="en-US" altLang="zh-CN" sz="900" b="0" i="0" u="none" strike="noStrike" dirty="0">
+                        <a:solidFill>
+                          <a:srgbClr val="000000"/>
+                        </a:solidFill>
+                        <a:effectLst/>
+                        <a:latin typeface="等线" panose="02010600030101010101" pitchFamily="2" charset="-122"/>
+                        <a:ea typeface="等线" panose="02010600030101010101" pitchFamily="2" charset="-122"/>
+                      </a:endParaRPr>
+                    </a:p>
+                  </a:txBody>
+                  <a:tcPr marL="5893" marR="5893" marT="5893" marB="0" anchor="b"/>
+                </a:tc>
+                <a:tc>
+                  <a:txBody>
+                    <a:bodyPr/>
+                    <a:lstStyle/>
+                    <a:p>
+                      <a:pPr algn="r" fontAlgn="b">
+                        <a:buNone/>
+                      </a:pPr>
+                      <a:r>
+                        <a:rPr lang="en-US" altLang="zh-CN" sz="900" u="none" strike="noStrike" dirty="0">
+                          <a:effectLst/>
+                        </a:rPr>
+                        <a:t>1</a:t>
+                      </a:r>
+                      <a:endParaRPr lang="en-US" altLang="zh-CN" sz="900" b="0" i="0" u="none" strike="noStrike" dirty="0">
                         <a:solidFill>
                           <a:srgbClr val="000000"/>
                         </a:solidFill>
@@ -15932,38 +16196,12 @@
                         <a:buNone/>
                       </a:pPr>
                       <a:r>
-                        <a:rPr lang="en-US" altLang="zh-CN" sz="900" u="none" strike="noStrike">
-                          <a:effectLst/>
-                        </a:rPr>
-                        <a:t>1</a:t>
-                      </a:r>
-                      <a:endParaRPr lang="en-US" altLang="zh-CN" sz="900" b="0" i="0" u="none" strike="noStrike">
-                        <a:solidFill>
-                          <a:srgbClr val="000000"/>
-                        </a:solidFill>
-                        <a:effectLst/>
-                        <a:latin typeface="等线" panose="02010600030101010101" pitchFamily="2" charset="-122"/>
-                        <a:ea typeface="等线" panose="02010600030101010101" pitchFamily="2" charset="-122"/>
-                      </a:endParaRPr>
-                    </a:p>
-                  </a:txBody>
-                  <a:tcPr marL="5893" marR="5893" marT="5893" marB="0" anchor="b"/>
-                </a:tc>
-                <a:tc>
-                  <a:txBody>
-                    <a:bodyPr/>
-                    <a:lstStyle/>
-                    <a:p>
-                      <a:pPr algn="r" fontAlgn="b">
-                        <a:buNone/>
-                      </a:pPr>
-                      <a:r>
-                        <a:rPr lang="en-US" altLang="zh-CN" sz="900" u="none" strike="noStrike">
+                        <a:rPr lang="en-US" altLang="zh-CN" sz="900" u="none" strike="noStrike" dirty="0">
                           <a:effectLst/>
                         </a:rPr>
                         <a:t>0.72</a:t>
                       </a:r>
-                      <a:endParaRPr lang="en-US" altLang="zh-CN" sz="900" b="0" i="0" u="none" strike="noStrike">
+                      <a:endParaRPr lang="en-US" altLang="zh-CN" sz="900" b="0" i="0" u="none" strike="noStrike" dirty="0">
                         <a:solidFill>
                           <a:srgbClr val="000000"/>
                         </a:solidFill>
@@ -16069,12 +16307,12 @@
                         <a:buNone/>
                       </a:pPr>
                       <a:r>
-                        <a:rPr lang="en-US" altLang="zh-CN" sz="900" u="none" strike="noStrike">
+                        <a:rPr lang="en-US" altLang="zh-CN" sz="900" u="none" strike="noStrike" dirty="0">
                           <a:effectLst/>
                         </a:rPr>
                         <a:t>0.9</a:t>
                       </a:r>
-                      <a:endParaRPr lang="en-US" altLang="zh-CN" sz="900" b="0" i="0" u="none" strike="noStrike">
+                      <a:endParaRPr lang="en-US" altLang="zh-CN" sz="900" b="0" i="0" u="none" strike="noStrike" dirty="0">
                         <a:solidFill>
                           <a:srgbClr val="000000"/>
                         </a:solidFill>
@@ -16147,12 +16385,12 @@
                         <a:buNone/>
                       </a:pPr>
                       <a:r>
-                        <a:rPr lang="en-US" altLang="zh-CN" sz="900" u="none" strike="noStrike">
+                        <a:rPr lang="en-US" altLang="zh-CN" sz="900" u="none" strike="noStrike" dirty="0">
                           <a:effectLst/>
                         </a:rPr>
                         <a:t>1</a:t>
                       </a:r>
-                      <a:endParaRPr lang="en-US" altLang="zh-CN" sz="900" b="0" i="0" u="none" strike="noStrike">
+                      <a:endParaRPr lang="en-US" altLang="zh-CN" sz="900" b="0" i="0" u="none" strike="noStrike" dirty="0">
                         <a:solidFill>
                           <a:srgbClr val="000000"/>
                         </a:solidFill>
@@ -16258,12 +16496,12 @@
                         <a:buNone/>
                       </a:pPr>
                       <a:r>
-                        <a:rPr lang="en-US" altLang="zh-CN" sz="900" u="none" strike="noStrike">
+                        <a:rPr lang="en-US" altLang="zh-CN" sz="900" u="none" strike="noStrike" dirty="0">
                           <a:effectLst/>
                         </a:rPr>
                         <a:t>0.685</a:t>
                       </a:r>
-                      <a:endParaRPr lang="en-US" altLang="zh-CN" sz="900" b="0" i="0" u="none" strike="noStrike">
+                      <a:endParaRPr lang="en-US" altLang="zh-CN" sz="900" b="0" i="0" u="none" strike="noStrike" dirty="0">
                         <a:solidFill>
                           <a:srgbClr val="000000"/>
                         </a:solidFill>
@@ -16284,12 +16522,12 @@
                         <a:buNone/>
                       </a:pPr>
                       <a:r>
-                        <a:rPr lang="en-US" altLang="zh-CN" sz="900" u="none" strike="noStrike">
+                        <a:rPr lang="en-US" altLang="zh-CN" sz="900" u="none" strike="noStrike" dirty="0">
                           <a:effectLst/>
                         </a:rPr>
                         <a:t>1.074074074</a:t>
                       </a:r>
-                      <a:endParaRPr lang="en-US" altLang="zh-CN" sz="900" b="0" i="0" u="none" strike="noStrike">
+                      <a:endParaRPr lang="en-US" altLang="zh-CN" sz="900" b="0" i="0" u="none" strike="noStrike" dirty="0">
                         <a:solidFill>
                           <a:srgbClr val="000000"/>
                         </a:solidFill>
@@ -16636,12 +16874,12 @@
                         <a:buNone/>
                       </a:pPr>
                       <a:r>
-                        <a:rPr lang="en-US" altLang="zh-CN" sz="900" u="none" strike="noStrike">
+                        <a:rPr lang="en-US" altLang="zh-CN" sz="900" u="none" strike="noStrike" dirty="0">
                           <a:effectLst/>
                         </a:rPr>
                         <a:t>1</a:t>
                       </a:r>
-                      <a:endParaRPr lang="en-US" altLang="zh-CN" sz="900" b="0" i="0" u="none" strike="noStrike">
+                      <a:endParaRPr lang="en-US" altLang="zh-CN" sz="900" b="0" i="0" u="none" strike="noStrike" dirty="0">
                         <a:solidFill>
                           <a:srgbClr val="000000"/>
                         </a:solidFill>
@@ -16714,12 +16952,12 @@
                         <a:buNone/>
                       </a:pPr>
                       <a:r>
-                        <a:rPr lang="en-US" altLang="zh-CN" sz="900" u="none" strike="noStrike">
+                        <a:rPr lang="en-US" altLang="zh-CN" sz="900" u="none" strike="noStrike" dirty="0">
                           <a:effectLst/>
                         </a:rPr>
                         <a:t>1</a:t>
                       </a:r>
-                      <a:endParaRPr lang="en-US" altLang="zh-CN" sz="900" b="0" i="0" u="none" strike="noStrike">
+                      <a:endParaRPr lang="en-US" altLang="zh-CN" sz="900" b="0" i="0" u="none" strike="noStrike" dirty="0">
                         <a:solidFill>
                           <a:srgbClr val="000000"/>
                         </a:solidFill>
@@ -16825,12 +17063,12 @@
                         <a:buNone/>
                       </a:pPr>
                       <a:r>
-                        <a:rPr lang="en-US" altLang="zh-CN" sz="900" u="none" strike="noStrike">
+                        <a:rPr lang="en-US" altLang="zh-CN" sz="900" u="none" strike="noStrike" dirty="0">
                           <a:effectLst/>
                         </a:rPr>
                         <a:t>1</a:t>
                       </a:r>
-                      <a:endParaRPr lang="en-US" altLang="zh-CN" sz="900" b="0" i="0" u="none" strike="noStrike">
+                      <a:endParaRPr lang="en-US" altLang="zh-CN" sz="900" b="0" i="0" u="none" strike="noStrike" dirty="0">
                         <a:solidFill>
                           <a:srgbClr val="000000"/>
                         </a:solidFill>
@@ -16851,12 +17089,12 @@
                         <a:buNone/>
                       </a:pPr>
                       <a:r>
-                        <a:rPr lang="en-US" altLang="zh-CN" sz="900" u="none" strike="noStrike">
+                        <a:rPr lang="en-US" altLang="zh-CN" sz="900" u="none" strike="noStrike" dirty="0">
                           <a:effectLst/>
                         </a:rPr>
                         <a:t>1.037037037</a:t>
                       </a:r>
-                      <a:endParaRPr lang="en-US" altLang="zh-CN" sz="900" b="0" i="0" u="none" strike="noStrike">
+                      <a:endParaRPr lang="en-US" altLang="zh-CN" sz="900" b="0" i="0" u="none" strike="noStrike" dirty="0">
                         <a:solidFill>
                           <a:srgbClr val="000000"/>
                         </a:solidFill>
@@ -17014,12 +17252,12 @@
                         <a:buNone/>
                       </a:pPr>
                       <a:r>
-                        <a:rPr lang="en-US" altLang="zh-CN" sz="900" u="none" strike="noStrike">
+                        <a:rPr lang="en-US" altLang="zh-CN" sz="900" u="none" strike="noStrike" dirty="0">
                           <a:effectLst/>
                         </a:rPr>
                         <a:t>0.9</a:t>
                       </a:r>
-                      <a:endParaRPr lang="en-US" altLang="zh-CN" sz="900" b="0" i="0" u="none" strike="noStrike">
+                      <a:endParaRPr lang="en-US" altLang="zh-CN" sz="900" b="0" i="0" u="none" strike="noStrike" dirty="0">
                         <a:solidFill>
                           <a:srgbClr val="000000"/>
                         </a:solidFill>
@@ -17203,12 +17441,12 @@
                         <a:buNone/>
                       </a:pPr>
                       <a:r>
-                        <a:rPr lang="en-US" altLang="zh-CN" sz="900" u="none" strike="noStrike">
+                        <a:rPr lang="en-US" altLang="zh-CN" sz="900" u="none" strike="noStrike" dirty="0">
                           <a:effectLst/>
                         </a:rPr>
                         <a:t>1</a:t>
                       </a:r>
-                      <a:endParaRPr lang="en-US" altLang="zh-CN" sz="900" b="0" i="0" u="none" strike="noStrike">
+                      <a:endParaRPr lang="en-US" altLang="zh-CN" sz="900" b="0" i="0" u="none" strike="noStrike" dirty="0">
                         <a:solidFill>
                           <a:srgbClr val="000000"/>
                         </a:solidFill>
@@ -17281,12 +17519,12 @@
                         <a:buNone/>
                       </a:pPr>
                       <a:r>
-                        <a:rPr lang="en-US" altLang="zh-CN" sz="900" u="none" strike="noStrike">
+                        <a:rPr lang="en-US" altLang="zh-CN" sz="900" u="none" strike="noStrike" dirty="0">
                           <a:effectLst/>
                         </a:rPr>
                         <a:t>1</a:t>
                       </a:r>
-                      <a:endParaRPr lang="en-US" altLang="zh-CN" sz="900" b="0" i="0" u="none" strike="noStrike">
+                      <a:endParaRPr lang="en-US" altLang="zh-CN" sz="900" b="0" i="0" u="none" strike="noStrike" dirty="0">
                         <a:solidFill>
                           <a:srgbClr val="000000"/>
                         </a:solidFill>
@@ -17392,12 +17630,12 @@
                         <a:buNone/>
                       </a:pPr>
                       <a:r>
-                        <a:rPr lang="en-US" altLang="zh-CN" sz="900" u="none" strike="noStrike">
+                        <a:rPr lang="en-US" altLang="zh-CN" sz="900" u="none" strike="noStrike" dirty="0">
                           <a:effectLst/>
                         </a:rPr>
                         <a:t>0.775</a:t>
                       </a:r>
-                      <a:endParaRPr lang="en-US" altLang="zh-CN" sz="900" b="0" i="0" u="none" strike="noStrike">
+                      <a:endParaRPr lang="en-US" altLang="zh-CN" sz="900" b="0" i="0" u="none" strike="noStrike" dirty="0">
                         <a:solidFill>
                           <a:srgbClr val="000000"/>
                         </a:solidFill>
@@ -17581,12 +17819,12 @@
                         <a:buNone/>
                       </a:pPr>
                       <a:r>
-                        <a:rPr lang="en-US" altLang="zh-CN" sz="900" u="none" strike="noStrike">
+                        <a:rPr lang="en-US" altLang="zh-CN" sz="900" u="none" strike="noStrike" dirty="0">
                           <a:effectLst/>
                         </a:rPr>
                         <a:t>1</a:t>
                       </a:r>
-                      <a:endParaRPr lang="en-US" altLang="zh-CN" sz="900" b="0" i="0" u="none" strike="noStrike">
+                      <a:endParaRPr lang="en-US" altLang="zh-CN" sz="900" b="0" i="0" u="none" strike="noStrike" dirty="0">
                         <a:solidFill>
                           <a:srgbClr val="000000"/>
                         </a:solidFill>
@@ -17796,12 +18034,12 @@
                         <a:buNone/>
                       </a:pPr>
                       <a:r>
-                        <a:rPr lang="en-US" altLang="zh-CN" sz="900" u="none" strike="noStrike">
+                        <a:rPr lang="en-US" altLang="zh-CN" sz="900" u="none" strike="noStrike" dirty="0">
                           <a:effectLst/>
                         </a:rPr>
                         <a:t>1</a:t>
                       </a:r>
-                      <a:endParaRPr lang="en-US" altLang="zh-CN" sz="900" b="0" i="0" u="none" strike="noStrike">
+                      <a:endParaRPr lang="en-US" altLang="zh-CN" sz="900" b="0" i="0" u="none" strike="noStrike" dirty="0">
                         <a:solidFill>
                           <a:srgbClr val="000000"/>
                         </a:solidFill>
@@ -17959,12 +18197,12 @@
                         <a:buNone/>
                       </a:pPr>
                       <a:r>
-                        <a:rPr lang="en-US" altLang="zh-CN" sz="900" u="none" strike="noStrike">
+                        <a:rPr lang="en-US" altLang="zh-CN" sz="900" u="none" strike="noStrike" dirty="0">
                           <a:effectLst/>
                         </a:rPr>
                         <a:t>0.65</a:t>
                       </a:r>
-                      <a:endParaRPr lang="en-US" altLang="zh-CN" sz="900" b="0" i="0" u="none" strike="noStrike">
+                      <a:endParaRPr lang="en-US" altLang="zh-CN" sz="900" b="0" i="0" u="none" strike="noStrike" dirty="0">
                         <a:solidFill>
                           <a:srgbClr val="000000"/>
                         </a:solidFill>
@@ -18148,12 +18386,12 @@
                         <a:buNone/>
                       </a:pPr>
                       <a:r>
-                        <a:rPr lang="en-US" altLang="zh-CN" sz="900" u="none" strike="noStrike">
+                        <a:rPr lang="en-US" altLang="zh-CN" sz="900" u="none" strike="noStrike" dirty="0">
                           <a:effectLst/>
                         </a:rPr>
                         <a:t>1</a:t>
                       </a:r>
-                      <a:endParaRPr lang="en-US" altLang="zh-CN" sz="900" b="0" i="0" u="none" strike="noStrike">
+                      <a:endParaRPr lang="en-US" altLang="zh-CN" sz="900" b="0" i="0" u="none" strike="noStrike" dirty="0">
                         <a:solidFill>
                           <a:srgbClr val="000000"/>
                         </a:solidFill>
@@ -18337,12 +18575,12 @@
                         <a:buNone/>
                       </a:pPr>
                       <a:r>
-                        <a:rPr lang="en-US" altLang="zh-CN" sz="900" u="none" strike="noStrike">
+                        <a:rPr lang="en-US" altLang="zh-CN" sz="900" u="none" strike="noStrike" dirty="0">
                           <a:effectLst/>
                         </a:rPr>
                         <a:t>1</a:t>
                       </a:r>
-                      <a:endParaRPr lang="en-US" altLang="zh-CN" sz="900" b="0" i="0" u="none" strike="noStrike">
+                      <a:endParaRPr lang="en-US" altLang="zh-CN" sz="900" b="0" i="0" u="none" strike="noStrike" dirty="0">
                         <a:solidFill>
                           <a:srgbClr val="000000"/>
                         </a:solidFill>
@@ -18415,12 +18653,12 @@
                         <a:buNone/>
                       </a:pPr>
                       <a:r>
-                        <a:rPr lang="en-US" altLang="zh-CN" sz="900" u="none" strike="noStrike">
+                        <a:rPr lang="en-US" altLang="zh-CN" sz="900" u="none" strike="noStrike" dirty="0">
                           <a:effectLst/>
                         </a:rPr>
                         <a:t>1</a:t>
                       </a:r>
-                      <a:endParaRPr lang="en-US" altLang="zh-CN" sz="900" b="0" i="0" u="none" strike="noStrike">
+                      <a:endParaRPr lang="en-US" altLang="zh-CN" sz="900" b="0" i="0" u="none" strike="noStrike" dirty="0">
                         <a:solidFill>
                           <a:srgbClr val="000000"/>
                         </a:solidFill>
@@ -18526,12 +18764,12 @@
                         <a:buNone/>
                       </a:pPr>
                       <a:r>
-                        <a:rPr lang="en-US" altLang="zh-CN" sz="900" u="none" strike="noStrike">
+                        <a:rPr lang="en-US" altLang="zh-CN" sz="900" u="none" strike="noStrike" dirty="0">
                           <a:effectLst/>
                         </a:rPr>
                         <a:t>1.1</a:t>
                       </a:r>
-                      <a:endParaRPr lang="en-US" altLang="zh-CN" sz="900" b="0" i="0" u="none" strike="noStrike">
+                      <a:endParaRPr lang="en-US" altLang="zh-CN" sz="900" b="0" i="0" u="none" strike="noStrike" dirty="0">
                         <a:solidFill>
                           <a:srgbClr val="000000"/>
                         </a:solidFill>
@@ -18578,12 +18816,12 @@
                         <a:buNone/>
                       </a:pPr>
                       <a:r>
-                        <a:rPr lang="en-US" altLang="zh-CN" sz="900" u="none" strike="noStrike">
+                        <a:rPr lang="en-US" altLang="zh-CN" sz="900" u="none" strike="noStrike" dirty="0">
                           <a:effectLst/>
                         </a:rPr>
                         <a:t>1</a:t>
                       </a:r>
-                      <a:endParaRPr lang="en-US" altLang="zh-CN" sz="900" b="0" i="0" u="none" strike="noStrike">
+                      <a:endParaRPr lang="en-US" altLang="zh-CN" sz="900" b="0" i="0" u="none" strike="noStrike" dirty="0">
                         <a:solidFill>
                           <a:srgbClr val="000000"/>
                         </a:solidFill>
@@ -18715,12 +18953,12 @@
                         <a:buNone/>
                       </a:pPr>
                       <a:r>
-                        <a:rPr lang="en-US" altLang="zh-CN" sz="900" u="none" strike="noStrike">
+                        <a:rPr lang="en-US" altLang="zh-CN" sz="900" u="none" strike="noStrike" dirty="0">
                           <a:effectLst/>
                         </a:rPr>
                         <a:t>1.6</a:t>
                       </a:r>
-                      <a:endParaRPr lang="en-US" altLang="zh-CN" sz="900" b="0" i="0" u="none" strike="noStrike">
+                      <a:endParaRPr lang="en-US" altLang="zh-CN" sz="900" b="0" i="0" u="none" strike="noStrike" dirty="0">
                         <a:solidFill>
                           <a:srgbClr val="000000"/>
                         </a:solidFill>
@@ -18767,12 +19005,12 @@
                         <a:buNone/>
                       </a:pPr>
                       <a:r>
-                        <a:rPr lang="en-US" altLang="zh-CN" sz="900" u="none" strike="noStrike">
+                        <a:rPr lang="en-US" altLang="zh-CN" sz="900" u="none" strike="noStrike" dirty="0">
                           <a:effectLst/>
                         </a:rPr>
                         <a:t>1</a:t>
                       </a:r>
-                      <a:endParaRPr lang="en-US" altLang="zh-CN" sz="900" b="0" i="0" u="none" strike="noStrike">
+                      <a:endParaRPr lang="en-US" altLang="zh-CN" sz="900" b="0" i="0" u="none" strike="noStrike" dirty="0">
                         <a:solidFill>
                           <a:srgbClr val="000000"/>
                         </a:solidFill>
@@ -18904,12 +19142,12 @@
                         <a:buNone/>
                       </a:pPr>
                       <a:r>
-                        <a:rPr lang="en-US" altLang="zh-CN" sz="900" u="none" strike="noStrike">
+                        <a:rPr lang="en-US" altLang="zh-CN" sz="900" u="none" strike="noStrike" dirty="0">
                           <a:effectLst/>
                         </a:rPr>
                         <a:t>1.5</a:t>
                       </a:r>
-                      <a:endParaRPr lang="en-US" altLang="zh-CN" sz="900" b="0" i="0" u="none" strike="noStrike">
+                      <a:endParaRPr lang="en-US" altLang="zh-CN" sz="900" b="0" i="0" u="none" strike="noStrike" dirty="0">
                         <a:solidFill>
                           <a:srgbClr val="000000"/>
                         </a:solidFill>
@@ -19093,12 +19331,12 @@
                         <a:buNone/>
                       </a:pPr>
                       <a:r>
-                        <a:rPr lang="en-US" altLang="zh-CN" sz="900" u="none" strike="noStrike">
+                        <a:rPr lang="en-US" altLang="zh-CN" sz="900" u="none" strike="noStrike" dirty="0">
                           <a:effectLst/>
                         </a:rPr>
                         <a:t>1.1</a:t>
                       </a:r>
-                      <a:endParaRPr lang="en-US" altLang="zh-CN" sz="900" b="0" i="0" u="none" strike="noStrike">
+                      <a:endParaRPr lang="en-US" altLang="zh-CN" sz="900" b="0" i="0" u="none" strike="noStrike" dirty="0">
                         <a:solidFill>
                           <a:srgbClr val="000000"/>
                         </a:solidFill>
@@ -19145,12 +19383,12 @@
                         <a:buNone/>
                       </a:pPr>
                       <a:r>
-                        <a:rPr lang="en-US" altLang="zh-CN" sz="900" u="none" strike="noStrike">
+                        <a:rPr lang="en-US" altLang="zh-CN" sz="900" u="none" strike="noStrike" dirty="0">
                           <a:effectLst/>
                         </a:rPr>
                         <a:t>1</a:t>
                       </a:r>
-                      <a:endParaRPr lang="en-US" altLang="zh-CN" sz="900" b="0" i="0" u="none" strike="noStrike">
+                      <a:endParaRPr lang="en-US" altLang="zh-CN" sz="900" b="0" i="0" u="none" strike="noStrike" dirty="0">
                         <a:solidFill>
                           <a:srgbClr val="000000"/>
                         </a:solidFill>
@@ -19282,12 +19520,12 @@
                         <a:buNone/>
                       </a:pPr>
                       <a:r>
-                        <a:rPr lang="en-US" altLang="zh-CN" sz="900" u="none" strike="noStrike">
+                        <a:rPr lang="en-US" altLang="zh-CN" sz="900" u="none" strike="noStrike" dirty="0">
                           <a:effectLst/>
                         </a:rPr>
                         <a:t>1</a:t>
                       </a:r>
-                      <a:endParaRPr lang="en-US" altLang="zh-CN" sz="900" b="0" i="0" u="none" strike="noStrike">
+                      <a:endParaRPr lang="en-US" altLang="zh-CN" sz="900" b="0" i="0" u="none" strike="noStrike" dirty="0">
                         <a:solidFill>
                           <a:srgbClr val="000000"/>
                         </a:solidFill>
@@ -19360,12 +19598,12 @@
                         <a:buNone/>
                       </a:pPr>
                       <a:r>
-                        <a:rPr lang="en-US" altLang="zh-CN" sz="900" u="none" strike="noStrike">
+                        <a:rPr lang="en-US" altLang="zh-CN" sz="900" u="none" strike="noStrike" dirty="0">
                           <a:effectLst/>
                         </a:rPr>
                         <a:t>1</a:t>
                       </a:r>
-                      <a:endParaRPr lang="en-US" altLang="zh-CN" sz="900" b="0" i="0" u="none" strike="noStrike">
+                      <a:endParaRPr lang="en-US" altLang="zh-CN" sz="900" b="0" i="0" u="none" strike="noStrike" dirty="0">
                         <a:solidFill>
                           <a:srgbClr val="000000"/>
                         </a:solidFill>
@@ -19471,12 +19709,12 @@
                         <a:buNone/>
                       </a:pPr>
                       <a:r>
-                        <a:rPr lang="en-US" altLang="zh-CN" sz="900" u="none" strike="noStrike">
+                        <a:rPr lang="en-US" altLang="zh-CN" sz="900" u="none" strike="noStrike" dirty="0">
                           <a:effectLst/>
                         </a:rPr>
                         <a:t>2.075</a:t>
                       </a:r>
-                      <a:endParaRPr lang="en-US" altLang="zh-CN" sz="900" b="0" i="0" u="none" strike="noStrike">
+                      <a:endParaRPr lang="en-US" altLang="zh-CN" sz="900" b="0" i="0" u="none" strike="noStrike" dirty="0">
                         <a:solidFill>
                           <a:srgbClr val="000000"/>
                         </a:solidFill>
@@ -19523,12 +19761,12 @@
                         <a:buNone/>
                       </a:pPr>
                       <a:r>
-                        <a:rPr lang="en-US" altLang="zh-CN" sz="900" u="none" strike="noStrike">
+                        <a:rPr lang="en-US" altLang="zh-CN" sz="900" u="none" strike="noStrike" dirty="0">
                           <a:effectLst/>
                         </a:rPr>
                         <a:t>1</a:t>
                       </a:r>
-                      <a:endParaRPr lang="en-US" altLang="zh-CN" sz="900" b="0" i="0" u="none" strike="noStrike">
+                      <a:endParaRPr lang="en-US" altLang="zh-CN" sz="900" b="0" i="0" u="none" strike="noStrike" dirty="0">
                         <a:solidFill>
                           <a:srgbClr val="000000"/>
                         </a:solidFill>
@@ -19660,12 +19898,12 @@
                         <a:buNone/>
                       </a:pPr>
                       <a:r>
-                        <a:rPr lang="en-US" altLang="zh-CN" sz="900" u="none" strike="noStrike">
+                        <a:rPr lang="en-US" altLang="zh-CN" sz="900" u="none" strike="noStrike" dirty="0">
                           <a:effectLst/>
                         </a:rPr>
                         <a:t>1.08</a:t>
                       </a:r>
-                      <a:endParaRPr lang="en-US" altLang="zh-CN" sz="900" b="0" i="0" u="none" strike="noStrike">
+                      <a:endParaRPr lang="en-US" altLang="zh-CN" sz="900" b="0" i="0" u="none" strike="noStrike" dirty="0">
                         <a:solidFill>
                           <a:srgbClr val="000000"/>
                         </a:solidFill>
@@ -19712,12 +19950,12 @@
                         <a:buNone/>
                       </a:pPr>
                       <a:r>
-                        <a:rPr lang="en-US" altLang="zh-CN" sz="900" u="none" strike="noStrike">
+                        <a:rPr lang="en-US" altLang="zh-CN" sz="900" u="none" strike="noStrike" dirty="0">
                           <a:effectLst/>
                         </a:rPr>
                         <a:t>1</a:t>
                       </a:r>
-                      <a:endParaRPr lang="en-US" altLang="zh-CN" sz="900" b="0" i="0" u="none" strike="noStrike">
+                      <a:endParaRPr lang="en-US" altLang="zh-CN" sz="900" b="0" i="0" u="none" strike="noStrike" dirty="0">
                         <a:solidFill>
                           <a:srgbClr val="000000"/>
                         </a:solidFill>
@@ -19738,12 +19976,12 @@
                         <a:buNone/>
                       </a:pPr>
                       <a:r>
-                        <a:rPr lang="en-US" altLang="zh-CN" sz="900" u="none" strike="noStrike">
+                        <a:rPr lang="en-US" altLang="zh-CN" sz="900" u="none" strike="noStrike" dirty="0">
                           <a:effectLst/>
                         </a:rPr>
                         <a:t>1</a:t>
                       </a:r>
-                      <a:endParaRPr lang="en-US" altLang="zh-CN" sz="900" b="0" i="0" u="none" strike="noStrike">
+                      <a:endParaRPr lang="en-US" altLang="zh-CN" sz="900" b="0" i="0" u="none" strike="noStrike" dirty="0">
                         <a:solidFill>
                           <a:srgbClr val="000000"/>
                         </a:solidFill>
@@ -19849,12 +20087,12 @@
                         <a:buNone/>
                       </a:pPr>
                       <a:r>
-                        <a:rPr lang="en-US" altLang="zh-CN" sz="900" u="none" strike="noStrike">
+                        <a:rPr lang="en-US" altLang="zh-CN" sz="900" u="none" strike="noStrike" dirty="0">
                           <a:effectLst/>
                         </a:rPr>
                         <a:t>1</a:t>
                       </a:r>
-                      <a:endParaRPr lang="en-US" altLang="zh-CN" sz="900" b="0" i="0" u="none" strike="noStrike">
+                      <a:endParaRPr lang="en-US" altLang="zh-CN" sz="900" b="0" i="0" u="none" strike="noStrike" dirty="0">
                         <a:solidFill>
                           <a:srgbClr val="000000"/>
                         </a:solidFill>
@@ -19901,12 +20139,12 @@
                         <a:buNone/>
                       </a:pPr>
                       <a:r>
-                        <a:rPr lang="en-US" altLang="zh-CN" sz="900" u="none" strike="noStrike">
+                        <a:rPr lang="en-US" altLang="zh-CN" sz="900" u="none" strike="noStrike" dirty="0">
                           <a:effectLst/>
                         </a:rPr>
                         <a:t>1</a:t>
                       </a:r>
-                      <a:endParaRPr lang="en-US" altLang="zh-CN" sz="900" b="0" i="0" u="none" strike="noStrike">
+                      <a:endParaRPr lang="en-US" altLang="zh-CN" sz="900" b="0" i="0" u="none" strike="noStrike" dirty="0">
                         <a:solidFill>
                           <a:srgbClr val="000000"/>
                         </a:solidFill>
@@ -19927,12 +20165,12 @@
                         <a:buNone/>
                       </a:pPr>
                       <a:r>
-                        <a:rPr lang="en-US" altLang="zh-CN" sz="900" u="none" strike="noStrike">
+                        <a:rPr lang="en-US" altLang="zh-CN" sz="900" u="none" strike="noStrike" dirty="0">
                           <a:effectLst/>
                         </a:rPr>
                         <a:t>1</a:t>
                       </a:r>
-                      <a:endParaRPr lang="en-US" altLang="zh-CN" sz="900" b="0" i="0" u="none" strike="noStrike">
+                      <a:endParaRPr lang="en-US" altLang="zh-CN" sz="900" b="0" i="0" u="none" strike="noStrike" dirty="0">
                         <a:solidFill>
                           <a:srgbClr val="000000"/>
                         </a:solidFill>
@@ -20038,12 +20276,12 @@
                         <a:buNone/>
                       </a:pPr>
                       <a:r>
-                        <a:rPr lang="en-US" altLang="zh-CN" sz="900" u="none" strike="noStrike">
+                        <a:rPr lang="en-US" altLang="zh-CN" sz="900" u="none" strike="noStrike" dirty="0">
                           <a:effectLst/>
                         </a:rPr>
                         <a:t>0.8</a:t>
                       </a:r>
-                      <a:endParaRPr lang="en-US" altLang="zh-CN" sz="900" b="0" i="0" u="none" strike="noStrike">
+                      <a:endParaRPr lang="en-US" altLang="zh-CN" sz="900" b="0" i="0" u="none" strike="noStrike" dirty="0">
                         <a:solidFill>
                           <a:srgbClr val="000000"/>
                         </a:solidFill>
@@ -20090,12 +20328,12 @@
                         <a:buNone/>
                       </a:pPr>
                       <a:r>
-                        <a:rPr lang="en-US" altLang="zh-CN" sz="900" u="none" strike="noStrike">
+                        <a:rPr lang="en-US" altLang="zh-CN" sz="900" u="none" strike="noStrike" dirty="0">
                           <a:effectLst/>
                         </a:rPr>
                         <a:t>1</a:t>
                       </a:r>
-                      <a:endParaRPr lang="en-US" altLang="zh-CN" sz="900" b="0" i="0" u="none" strike="noStrike">
+                      <a:endParaRPr lang="en-US" altLang="zh-CN" sz="900" b="0" i="0" u="none" strike="noStrike" dirty="0">
                         <a:solidFill>
                           <a:srgbClr val="000000"/>
                         </a:solidFill>
@@ -20227,12 +20465,12 @@
                         <a:buNone/>
                       </a:pPr>
                       <a:r>
-                        <a:rPr lang="en-US" altLang="zh-CN" sz="900" u="none" strike="noStrike">
+                        <a:rPr lang="en-US" altLang="zh-CN" sz="900" u="none" strike="noStrike" dirty="0">
                           <a:effectLst/>
                         </a:rPr>
                         <a:t>1.5</a:t>
                       </a:r>
-                      <a:endParaRPr lang="en-US" altLang="zh-CN" sz="900" b="0" i="0" u="none" strike="noStrike">
+                      <a:endParaRPr lang="en-US" altLang="zh-CN" sz="900" b="0" i="0" u="none" strike="noStrike" dirty="0">
                         <a:solidFill>
                           <a:srgbClr val="000000"/>
                         </a:solidFill>
@@ -20279,12 +20517,12 @@
                         <a:buNone/>
                       </a:pPr>
                       <a:r>
-                        <a:rPr lang="en-US" altLang="zh-CN" sz="900" u="none" strike="noStrike">
+                        <a:rPr lang="en-US" altLang="zh-CN" sz="900" u="none" strike="noStrike" dirty="0">
                           <a:effectLst/>
                         </a:rPr>
                         <a:t>1</a:t>
                       </a:r>
-                      <a:endParaRPr lang="en-US" altLang="zh-CN" sz="900" b="0" i="0" u="none" strike="noStrike">
+                      <a:endParaRPr lang="en-US" altLang="zh-CN" sz="900" b="0" i="0" u="none" strike="noStrike" dirty="0">
                         <a:solidFill>
                           <a:srgbClr val="000000"/>
                         </a:solidFill>
@@ -20305,12 +20543,12 @@
                         <a:buNone/>
                       </a:pPr>
                       <a:r>
-                        <a:rPr lang="en-US" altLang="zh-CN" sz="900" u="none" strike="noStrike">
+                        <a:rPr lang="en-US" altLang="zh-CN" sz="900" u="none" strike="noStrike" dirty="0">
                           <a:effectLst/>
                         </a:rPr>
                         <a:t>1.4</a:t>
                       </a:r>
-                      <a:endParaRPr lang="en-US" altLang="zh-CN" sz="900" b="0" i="0" u="none" strike="noStrike">
+                      <a:endParaRPr lang="en-US" altLang="zh-CN" sz="900" b="0" i="0" u="none" strike="noStrike" dirty="0">
                         <a:solidFill>
                           <a:srgbClr val="000000"/>
                         </a:solidFill>
@@ -20416,12 +20654,12 @@
                         <a:buNone/>
                       </a:pPr>
                       <a:r>
-                        <a:rPr lang="en-US" altLang="zh-CN" sz="900" u="none" strike="noStrike">
+                        <a:rPr lang="en-US" altLang="zh-CN" sz="900" u="none" strike="noStrike" dirty="0">
                           <a:effectLst/>
                         </a:rPr>
                         <a:t>2.61</a:t>
                       </a:r>
-                      <a:endParaRPr lang="en-US" altLang="zh-CN" sz="900" b="0" i="0" u="none" strike="noStrike">
+                      <a:endParaRPr lang="en-US" altLang="zh-CN" sz="900" b="0" i="0" u="none" strike="noStrike" dirty="0">
                         <a:solidFill>
                           <a:srgbClr val="000000"/>
                         </a:solidFill>
@@ -20468,12 +20706,12 @@
                         <a:buNone/>
                       </a:pPr>
                       <a:r>
-                        <a:rPr lang="en-US" altLang="zh-CN" sz="900" u="none" strike="noStrike">
+                        <a:rPr lang="en-US" altLang="zh-CN" sz="900" u="none" strike="noStrike" dirty="0">
                           <a:effectLst/>
                         </a:rPr>
                         <a:t>1</a:t>
                       </a:r>
-                      <a:endParaRPr lang="en-US" altLang="zh-CN" sz="900" b="0" i="0" u="none" strike="noStrike">
+                      <a:endParaRPr lang="en-US" altLang="zh-CN" sz="900" b="0" i="0" u="none" strike="noStrike" dirty="0">
                         <a:solidFill>
                           <a:srgbClr val="000000"/>
                         </a:solidFill>
@@ -20494,12 +20732,12 @@
                         <a:buNone/>
                       </a:pPr>
                       <a:r>
-                        <a:rPr lang="en-US" altLang="zh-CN" sz="900" u="none" strike="noStrike">
+                        <a:rPr lang="en-US" altLang="zh-CN" sz="900" u="none" strike="noStrike" dirty="0">
                           <a:effectLst/>
                         </a:rPr>
                         <a:t>2.2</a:t>
                       </a:r>
-                      <a:endParaRPr lang="en-US" altLang="zh-CN" sz="900" b="0" i="0" u="none" strike="noStrike">
+                      <a:endParaRPr lang="en-US" altLang="zh-CN" sz="900" b="0" i="0" u="none" strike="noStrike" dirty="0">
                         <a:solidFill>
                           <a:srgbClr val="000000"/>
                         </a:solidFill>
@@ -20605,12 +20843,12 @@
                         <a:buNone/>
                       </a:pPr>
                       <a:r>
-                        <a:rPr lang="en-US" altLang="zh-CN" sz="900" u="none" strike="noStrike">
+                        <a:rPr lang="en-US" altLang="zh-CN" sz="900" u="none" strike="noStrike" dirty="0">
                           <a:effectLst/>
                         </a:rPr>
                         <a:t>1</a:t>
                       </a:r>
-                      <a:endParaRPr lang="en-US" altLang="zh-CN" sz="900" b="0" i="0" u="none" strike="noStrike">
+                      <a:endParaRPr lang="en-US" altLang="zh-CN" sz="900" b="0" i="0" u="none" strike="noStrike" dirty="0">
                         <a:solidFill>
                           <a:srgbClr val="000000"/>
                         </a:solidFill>
@@ -20657,12 +20895,12 @@
                         <a:buNone/>
                       </a:pPr>
                       <a:r>
-                        <a:rPr lang="en-US" altLang="zh-CN" sz="900" u="none" strike="noStrike">
+                        <a:rPr lang="en-US" altLang="zh-CN" sz="900" u="none" strike="noStrike" dirty="0">
                           <a:effectLst/>
                         </a:rPr>
                         <a:t>1</a:t>
                       </a:r>
-                      <a:endParaRPr lang="en-US" altLang="zh-CN" sz="900" b="0" i="0" u="none" strike="noStrike">
+                      <a:endParaRPr lang="en-US" altLang="zh-CN" sz="900" b="0" i="0" u="none" strike="noStrike" dirty="0">
                         <a:solidFill>
                           <a:srgbClr val="000000"/>
                         </a:solidFill>
@@ -20846,12 +21084,12 @@
                         <a:buNone/>
                       </a:pPr>
                       <a:r>
-                        <a:rPr lang="en-US" altLang="zh-CN" sz="900" u="none" strike="noStrike">
+                        <a:rPr lang="en-US" altLang="zh-CN" sz="900" u="none" strike="noStrike" dirty="0">
                           <a:effectLst/>
                         </a:rPr>
                         <a:t>1</a:t>
                       </a:r>
-                      <a:endParaRPr lang="en-US" altLang="zh-CN" sz="900" b="0" i="0" u="none" strike="noStrike">
+                      <a:endParaRPr lang="en-US" altLang="zh-CN" sz="900" b="0" i="0" u="none" strike="noStrike" dirty="0">
                         <a:solidFill>
                           <a:srgbClr val="000000"/>
                         </a:solidFill>
@@ -22860,7 +23098,7 @@
         <p:spPr>
           <a:xfrm>
             <a:off x="621873" y="1763072"/>
-            <a:ext cx="10673971" cy="3693319"/>
+            <a:ext cx="10673971" cy="4339650"/>
           </a:xfrm>
           <a:prstGeom prst="rect">
             <a:avLst/>
@@ -22917,7 +23155,49 @@
                 <a:latin typeface="微软雅黑" panose="020B0503020204020204" pitchFamily="34" charset="-122"/>
                 <a:ea typeface="微软雅黑" panose="020B0503020204020204" pitchFamily="34" charset="-122"/>
               </a:rPr>
-              <a:t>另一方面，发现地方在文本上对“非化石能源占比”指标信心不足，对应的，我们没有发现中央或地方文件的发布对非化石能源占比产生冲击；而当我们引入语调后，能够发现强语调能在一定水平上对非化石能源占比增长率有显著的正向冲击。</a:t>
+              <a:t>另一方面，发现地方在文本上（集中在 </a:t>
+            </a:r>
+            <a:r>
+              <a:rPr lang="en-US" altLang="zh-CN" sz="1400" dirty="0">
+                <a:latin typeface="微软雅黑" panose="020B0503020204020204" pitchFamily="34" charset="-122"/>
+                <a:ea typeface="微软雅黑" panose="020B0503020204020204" pitchFamily="34" charset="-122"/>
+              </a:rPr>
+              <a:t>2022</a:t>
+            </a:r>
+            <a:r>
+              <a:rPr lang="zh-CN" altLang="en-US" sz="1400" dirty="0">
+                <a:latin typeface="微软雅黑" panose="020B0503020204020204" pitchFamily="34" charset="-122"/>
+                <a:ea typeface="微软雅黑" panose="020B0503020204020204" pitchFamily="34" charset="-122"/>
+              </a:rPr>
+              <a:t>年</a:t>
+            </a:r>
+            <a:r>
+              <a:rPr lang="en-US" altLang="zh-CN" sz="1400" dirty="0">
+                <a:latin typeface="微软雅黑" panose="020B0503020204020204" pitchFamily="34" charset="-122"/>
+                <a:ea typeface="微软雅黑" panose="020B0503020204020204" pitchFamily="34" charset="-122"/>
+              </a:rPr>
+              <a:t>6</a:t>
+            </a:r>
+            <a:r>
+              <a:rPr lang="zh-CN" altLang="en-US" sz="1400" dirty="0">
+                <a:latin typeface="微软雅黑" panose="020B0503020204020204" pitchFamily="34" charset="-122"/>
+                <a:ea typeface="微软雅黑" panose="020B0503020204020204" pitchFamily="34" charset="-122"/>
+              </a:rPr>
+              <a:t>月 至 </a:t>
+            </a:r>
+            <a:r>
+              <a:rPr lang="en-US" altLang="zh-CN" sz="1400" dirty="0">
+                <a:latin typeface="微软雅黑" panose="020B0503020204020204" pitchFamily="34" charset="-122"/>
+                <a:ea typeface="微软雅黑" panose="020B0503020204020204" pitchFamily="34" charset="-122"/>
+              </a:rPr>
+              <a:t>2023</a:t>
+            </a:r>
+            <a:r>
+              <a:rPr lang="zh-CN" altLang="en-US" sz="1400" dirty="0">
+                <a:latin typeface="微软雅黑" panose="020B0503020204020204" pitchFamily="34" charset="-122"/>
+                <a:ea typeface="微软雅黑" panose="020B0503020204020204" pitchFamily="34" charset="-122"/>
+              </a:rPr>
+              <a:t>年初）对“非化石能源占比”指标信心不足，对应的，我们没有发现中央或地方文件的发布对非化石能源占比产生冲击；而当我们引入语调后，能够发现强语调能在一定水平上对非化石能源占比增长率有显著的正向冲击。</a:t>
             </a:r>
             <a:endParaRPr lang="en-US" altLang="zh-CN" sz="1400" dirty="0">
               <a:latin typeface="微软雅黑" panose="020B0503020204020204" pitchFamily="34" charset="-122"/>
@@ -23112,6 +23392,44 @@
                 <a:ea typeface="微软雅黑" panose="020B0503020204020204" pitchFamily="34" charset="-122"/>
               </a:rPr>
               <a:t>控制变量没有进行考虑</a:t>
+            </a:r>
+            <a:endParaRPr lang="en-US" altLang="zh-CN" sz="1400" dirty="0">
+              <a:solidFill>
+                <a:prstClr val="black"/>
+              </a:solidFill>
+              <a:latin typeface="微软雅黑" panose="020B0503020204020204" pitchFamily="34" charset="-122"/>
+              <a:ea typeface="微软雅黑" panose="020B0503020204020204" pitchFamily="34" charset="-122"/>
+            </a:endParaRPr>
+          </a:p>
+          <a:p>
+            <a:endParaRPr lang="en-US" altLang="zh-CN" sz="1400" dirty="0">
+              <a:solidFill>
+                <a:prstClr val="black"/>
+              </a:solidFill>
+              <a:latin typeface="微软雅黑" panose="020B0503020204020204" pitchFamily="34" charset="-122"/>
+              <a:ea typeface="微软雅黑" panose="020B0503020204020204" pitchFamily="34" charset="-122"/>
+            </a:endParaRPr>
+          </a:p>
+          <a:p>
+            <a:r>
+              <a:rPr lang="en-US" altLang="zh-CN" sz="1400" dirty="0">
+                <a:solidFill>
+                  <a:prstClr val="black"/>
+                </a:solidFill>
+                <a:latin typeface="微软雅黑" panose="020B0503020204020204" pitchFamily="34" charset="-122"/>
+                <a:ea typeface="微软雅黑" panose="020B0503020204020204" pitchFamily="34" charset="-122"/>
+              </a:rPr>
+              <a:t>4.</a:t>
+            </a:r>
+            <a:r>
+              <a:rPr lang="zh-CN" altLang="en-US" sz="1400" dirty="0">
+                <a:solidFill>
+                  <a:prstClr val="black"/>
+                </a:solidFill>
+                <a:latin typeface="微软雅黑" panose="020B0503020204020204" pitchFamily="34" charset="-122"/>
+                <a:ea typeface="微软雅黑" panose="020B0503020204020204" pitchFamily="34" charset="-122"/>
+              </a:rPr>
+              <a:t>暂时还没有做安慰剂检验，不过之前自己算的时候有试过，完整去做应该也很快</a:t>
             </a:r>
             <a:r>
               <a:rPr lang="en-US" altLang="zh-CN" dirty="0">
@@ -44323,6 +44641,421 @@
           </a:p>
         </p:txBody>
       </p:sp>
+      <p:sp>
+        <p:nvSpPr>
+          <p:cNvPr id="2" name="Rectangle 2">
+            <a:extLst>
+              <a:ext uri="{FF2B5EF4-FFF2-40B4-BE49-F238E27FC236}">
+                <a16:creationId xmlns:a16="http://schemas.microsoft.com/office/drawing/2014/main" id="{6A04CE3C-1779-8C85-306B-3F6339612489}"/>
+              </a:ext>
+            </a:extLst>
+          </p:cNvPr>
+          <p:cNvSpPr>
+            <a:spLocks noChangeArrowheads="1"/>
+          </p:cNvSpPr>
+          <p:nvPr/>
+        </p:nvSpPr>
+        <p:spPr bwMode="auto">
+          <a:xfrm>
+            <a:off x="621873" y="5099362"/>
+            <a:ext cx="11053380" cy="646331"/>
+          </a:xfrm>
+          <a:prstGeom prst="rect">
+            <a:avLst/>
+          </a:prstGeom>
+          <a:noFill/>
+          <a:ln>
+            <a:noFill/>
+          </a:ln>
+          <a:effectLst/>
+          <a:extLst>
+            <a:ext uri="{909E8E84-426E-40DD-AFC4-6F175D3DCCD1}">
+              <a14:hiddenFill xmlns:a14="http://schemas.microsoft.com/office/drawing/2010/main">
+                <a:solidFill>
+                  <a:schemeClr val="accent1"/>
+                </a:solidFill>
+              </a14:hiddenFill>
+            </a:ext>
+            <a:ext uri="{91240B29-F687-4F45-9708-019B960494DF}">
+              <a14:hiddenLine xmlns:a14="http://schemas.microsoft.com/office/drawing/2010/main" w="9525">
+                <a:solidFill>
+                  <a:schemeClr val="tx1"/>
+                </a:solidFill>
+                <a:miter lim="800000"/>
+                <a:headEnd/>
+                <a:tailEnd/>
+              </a14:hiddenLine>
+            </a:ext>
+            <a:ext uri="{AF507438-7753-43E0-B8FC-AC1667EBCBE1}">
+              <a14:hiddenEffects xmlns:a14="http://schemas.microsoft.com/office/drawing/2010/main">
+                <a:effectLst>
+                  <a:outerShdw dist="35921" dir="2700000" algn="ctr" rotWithShape="0">
+                    <a:schemeClr val="bg2"/>
+                  </a:outerShdw>
+                </a:effectLst>
+              </a14:hiddenEffects>
+            </a:ext>
+          </a:extLst>
+        </p:spPr>
+        <p:txBody>
+          <a:bodyPr vert="horz" wrap="square" lIns="91440" tIns="45720" rIns="91440" bIns="45720" numCol="1" anchor="ctr" anchorCtr="0" compatLnSpc="1">
+            <a:prstTxWarp prst="textNoShape">
+              <a:avLst/>
+            </a:prstTxWarp>
+            <a:spAutoFit/>
+          </a:bodyPr>
+          <a:lstStyle/>
+          <a:p>
+            <a:pPr marL="0" marR="0" lvl="0" indent="0" algn="l" defTabSz="914400" rtl="0" eaLnBrk="0" fontAlgn="base" latinLnBrk="0" hangingPunct="0">
+              <a:lnSpc>
+                <a:spcPct val="100000"/>
+              </a:lnSpc>
+              <a:spcBef>
+                <a:spcPct val="0"/>
+              </a:spcBef>
+              <a:spcAft>
+                <a:spcPct val="0"/>
+              </a:spcAft>
+              <a:buClrTx/>
+              <a:buSzTx/>
+              <a:buFontTx/>
+              <a:buNone/>
+              <a:tabLst/>
+            </a:pPr>
+            <a:r>
+              <a:rPr kumimoji="0" lang="zh-CN" altLang="zh-CN" sz="1200" b="0" i="0" u="none" strike="noStrike" cap="none" normalizeH="0" baseline="0" dirty="0">
+                <a:ln>
+                  <a:noFill/>
+                </a:ln>
+                <a:solidFill>
+                  <a:schemeClr val="tx1">
+                    <a:lumMod val="50000"/>
+                    <a:lumOff val="50000"/>
+                  </a:schemeClr>
+                </a:solidFill>
+                <a:effectLst/>
+                <a:latin typeface="等线" panose="02010600030101010101" pitchFamily="2" charset="-122"/>
+                <a:ea typeface="等线" panose="02010600030101010101" pitchFamily="2" charset="-122"/>
+                <a:cs typeface="Times New Roman" panose="02020603050405020304" pitchFamily="18" charset="0"/>
+              </a:rPr>
+              <a:t>作为比照的一个例子是</a:t>
+            </a:r>
+            <a:r>
+              <a:rPr kumimoji="0" lang="en-US" altLang="zh-CN" sz="1200" b="0" i="0" u="none" strike="noStrike" cap="none" normalizeH="0" baseline="0" dirty="0">
+                <a:ln>
+                  <a:noFill/>
+                </a:ln>
+                <a:solidFill>
+                  <a:schemeClr val="tx1">
+                    <a:lumMod val="50000"/>
+                    <a:lumOff val="50000"/>
+                  </a:schemeClr>
+                </a:solidFill>
+                <a:effectLst/>
+                <a:latin typeface="等线" panose="02010600030101010101" pitchFamily="2" charset="-122"/>
+                <a:ea typeface="等线" panose="02010600030101010101" pitchFamily="2" charset="-122"/>
+                <a:cs typeface="Times New Roman" panose="02020603050405020304" pitchFamily="18" charset="0"/>
+              </a:rPr>
+              <a:t>JPE</a:t>
+            </a:r>
+            <a:r>
+              <a:rPr kumimoji="0" lang="zh-CN" altLang="en-US" sz="1200" b="0" i="0" u="none" strike="noStrike" cap="none" normalizeH="0" baseline="0" dirty="0">
+                <a:ln>
+                  <a:noFill/>
+                </a:ln>
+                <a:solidFill>
+                  <a:schemeClr val="tx1">
+                    <a:lumMod val="50000"/>
+                    <a:lumOff val="50000"/>
+                  </a:schemeClr>
+                </a:solidFill>
+                <a:effectLst/>
+                <a:latin typeface="等线" panose="02010600030101010101" pitchFamily="2" charset="-122"/>
+                <a:ea typeface="等线" panose="02010600030101010101" pitchFamily="2" charset="-122"/>
+                <a:cs typeface="Times New Roman" panose="02020603050405020304" pitchFamily="18" charset="0"/>
+              </a:rPr>
+              <a:t>（</a:t>
+            </a:r>
+            <a:r>
+              <a:rPr kumimoji="0" lang="en-US" altLang="zh-CN" sz="1200" b="0" i="0" u="none" strike="noStrike" cap="none" normalizeH="0" baseline="0" dirty="0">
+                <a:ln>
+                  <a:noFill/>
+                </a:ln>
+                <a:solidFill>
+                  <a:schemeClr val="tx1">
+                    <a:lumMod val="50000"/>
+                    <a:lumOff val="50000"/>
+                  </a:schemeClr>
+                </a:solidFill>
+                <a:effectLst/>
+                <a:latin typeface="等线" panose="02010600030101010101" pitchFamily="2" charset="-122"/>
+                <a:ea typeface="等线" panose="02010600030101010101" pitchFamily="2" charset="-122"/>
+                <a:cs typeface="Times New Roman" panose="02020603050405020304" pitchFamily="18" charset="0"/>
+              </a:rPr>
+              <a:t>Policy Experimentation in China_ the Political Economy of Policy Learning</a:t>
+            </a:r>
+            <a:r>
+              <a:rPr kumimoji="0" lang="zh-CN" altLang="en-US" sz="1200" b="0" i="0" u="none" strike="noStrike" cap="none" normalizeH="0" baseline="0" dirty="0">
+                <a:ln>
+                  <a:noFill/>
+                </a:ln>
+                <a:solidFill>
+                  <a:schemeClr val="tx1">
+                    <a:lumMod val="50000"/>
+                    <a:lumOff val="50000"/>
+                  </a:schemeClr>
+                </a:solidFill>
+                <a:effectLst/>
+                <a:latin typeface="等线" panose="02010600030101010101" pitchFamily="2" charset="-122"/>
+                <a:ea typeface="等线" panose="02010600030101010101" pitchFamily="2" charset="-122"/>
+                <a:cs typeface="Times New Roman" panose="02020603050405020304" pitchFamily="18" charset="0"/>
+              </a:rPr>
+              <a:t>（</a:t>
+            </a:r>
+            <a:r>
+              <a:rPr kumimoji="0" lang="en-US" altLang="zh-CN" sz="1200" b="0" i="0" u="none" strike="noStrike" cap="none" normalizeH="0" baseline="0" dirty="0">
+                <a:ln>
+                  <a:noFill/>
+                </a:ln>
+                <a:solidFill>
+                  <a:schemeClr val="tx1">
+                    <a:lumMod val="50000"/>
+                    <a:lumOff val="50000"/>
+                  </a:schemeClr>
+                </a:solidFill>
+                <a:effectLst/>
+                <a:latin typeface="等线" panose="02010600030101010101" pitchFamily="2" charset="-122"/>
+                <a:ea typeface="等线" panose="02010600030101010101" pitchFamily="2" charset="-122"/>
+                <a:cs typeface="Times New Roman" panose="02020603050405020304" pitchFamily="18" charset="0"/>
+              </a:rPr>
+              <a:t>Journal of Political Economy</a:t>
+            </a:r>
+            <a:r>
+              <a:rPr kumimoji="0" lang="zh-CN" altLang="en-US" sz="1200" b="0" i="0" u="none" strike="noStrike" cap="none" normalizeH="0" baseline="0" dirty="0">
+                <a:ln>
+                  <a:noFill/>
+                </a:ln>
+                <a:solidFill>
+                  <a:schemeClr val="tx1">
+                    <a:lumMod val="50000"/>
+                    <a:lumOff val="50000"/>
+                  </a:schemeClr>
+                </a:solidFill>
+                <a:effectLst/>
+                <a:latin typeface="等线" panose="02010600030101010101" pitchFamily="2" charset="-122"/>
+                <a:ea typeface="等线" panose="02010600030101010101" pitchFamily="2" charset="-122"/>
+                <a:cs typeface="Times New Roman" panose="02020603050405020304" pitchFamily="18" charset="0"/>
+              </a:rPr>
+              <a:t>））那篇中讨论，某个领域下某个省份在某年份发布的政策数量（政策处理强度），是否会造成对应领域的偏向性财政支持，那它的被解释变量其实是</a:t>
+            </a:r>
+            <a:r>
+              <a:rPr kumimoji="0" lang="en-US" altLang="zh-CN" sz="1200" b="0" i="0" u="none" strike="noStrike" cap="none" normalizeH="0" baseline="0" dirty="0">
+                <a:ln>
+                  <a:noFill/>
+                </a:ln>
+                <a:solidFill>
+                  <a:schemeClr val="tx1">
+                    <a:lumMod val="50000"/>
+                    <a:lumOff val="50000"/>
+                  </a:schemeClr>
+                </a:solidFill>
+                <a:effectLst/>
+                <a:latin typeface="等线" panose="02010600030101010101" pitchFamily="2" charset="-122"/>
+                <a:ea typeface="等线" panose="02010600030101010101" pitchFamily="2" charset="-122"/>
+                <a:cs typeface="Times New Roman" panose="02020603050405020304" pitchFamily="18" charset="0"/>
+              </a:rPr>
+              <a:t>t</a:t>
+            </a:r>
+            <a:r>
+              <a:rPr kumimoji="0" lang="zh-CN" altLang="en-US" sz="1200" b="0" i="0" u="none" strike="noStrike" cap="none" normalizeH="0" baseline="0" dirty="0">
+                <a:ln>
+                  <a:noFill/>
+                </a:ln>
+                <a:solidFill>
+                  <a:schemeClr val="tx1">
+                    <a:lumMod val="50000"/>
+                    <a:lumOff val="50000"/>
+                  </a:schemeClr>
+                </a:solidFill>
+                <a:effectLst/>
+                <a:latin typeface="等线" panose="02010600030101010101" pitchFamily="2" charset="-122"/>
+                <a:ea typeface="等线" panose="02010600030101010101" pitchFamily="2" charset="-122"/>
+                <a:cs typeface="Times New Roman" panose="02020603050405020304" pitchFamily="18" charset="0"/>
+              </a:rPr>
+              <a:t>年份省份</a:t>
+            </a:r>
+            <a:r>
+              <a:rPr kumimoji="0" lang="en-US" altLang="zh-CN" sz="1200" b="0" i="0" u="none" strike="noStrike" cap="none" normalizeH="0" baseline="0" dirty="0" err="1">
+                <a:ln>
+                  <a:noFill/>
+                </a:ln>
+                <a:solidFill>
+                  <a:schemeClr val="tx1">
+                    <a:lumMod val="50000"/>
+                    <a:lumOff val="50000"/>
+                  </a:schemeClr>
+                </a:solidFill>
+                <a:effectLst/>
+                <a:latin typeface="等线" panose="02010600030101010101" pitchFamily="2" charset="-122"/>
+                <a:ea typeface="等线" panose="02010600030101010101" pitchFamily="2" charset="-122"/>
+                <a:cs typeface="Times New Roman" panose="02020603050405020304" pitchFamily="18" charset="0"/>
+              </a:rPr>
+              <a:t>i</a:t>
+            </a:r>
+            <a:r>
+              <a:rPr kumimoji="0" lang="zh-CN" altLang="en-US" sz="1200" b="0" i="0" u="none" strike="noStrike" cap="none" normalizeH="0" baseline="0" dirty="0">
+                <a:ln>
+                  <a:noFill/>
+                </a:ln>
+                <a:solidFill>
+                  <a:schemeClr val="tx1">
+                    <a:lumMod val="50000"/>
+                    <a:lumOff val="50000"/>
+                  </a:schemeClr>
+                </a:solidFill>
+                <a:effectLst/>
+                <a:latin typeface="等线" panose="02010600030101010101" pitchFamily="2" charset="-122"/>
+                <a:ea typeface="等线" panose="02010600030101010101" pitchFamily="2" charset="-122"/>
+                <a:cs typeface="Times New Roman" panose="02020603050405020304" pitchFamily="18" charset="0"/>
+              </a:rPr>
+              <a:t>在</a:t>
+            </a:r>
+            <a:r>
+              <a:rPr kumimoji="0" lang="en-US" altLang="zh-CN" sz="1200" b="0" i="0" u="none" strike="noStrike" cap="none" normalizeH="0" baseline="0" dirty="0">
+                <a:ln>
+                  <a:noFill/>
+                </a:ln>
+                <a:solidFill>
+                  <a:schemeClr val="tx1">
+                    <a:lumMod val="50000"/>
+                    <a:lumOff val="50000"/>
+                  </a:schemeClr>
+                </a:solidFill>
+                <a:effectLst/>
+                <a:latin typeface="等线" panose="02010600030101010101" pitchFamily="2" charset="-122"/>
+                <a:ea typeface="等线" panose="02010600030101010101" pitchFamily="2" charset="-122"/>
+                <a:cs typeface="Times New Roman" panose="02020603050405020304" pitchFamily="18" charset="0"/>
+              </a:rPr>
+              <a:t>k</a:t>
+            </a:r>
+            <a:r>
+              <a:rPr kumimoji="0" lang="zh-CN" altLang="en-US" sz="1200" b="0" i="0" u="none" strike="noStrike" cap="none" normalizeH="0" baseline="0" dirty="0">
+                <a:ln>
+                  <a:noFill/>
+                </a:ln>
+                <a:solidFill>
+                  <a:schemeClr val="tx1">
+                    <a:lumMod val="50000"/>
+                    <a:lumOff val="50000"/>
+                  </a:schemeClr>
+                </a:solidFill>
+                <a:effectLst/>
+                <a:latin typeface="等线" panose="02010600030101010101" pitchFamily="2" charset="-122"/>
+                <a:ea typeface="等线" panose="02010600030101010101" pitchFamily="2" charset="-122"/>
+                <a:cs typeface="Times New Roman" panose="02020603050405020304" pitchFamily="18" charset="0"/>
+              </a:rPr>
+              <a:t>领域的财政支出占比；以此构成一个</a:t>
+            </a:r>
+            <a:r>
+              <a:rPr kumimoji="0" lang="en-US" altLang="zh-CN" sz="1200" b="0" i="0" u="none" strike="noStrike" cap="none" normalizeH="0" baseline="0" dirty="0">
+                <a:ln>
+                  <a:noFill/>
+                </a:ln>
+                <a:solidFill>
+                  <a:schemeClr val="tx1">
+                    <a:lumMod val="50000"/>
+                    <a:lumOff val="50000"/>
+                  </a:schemeClr>
+                </a:solidFill>
+                <a:effectLst/>
+                <a:latin typeface="等线" panose="02010600030101010101" pitchFamily="2" charset="-122"/>
+                <a:ea typeface="等线" panose="02010600030101010101" pitchFamily="2" charset="-122"/>
+                <a:cs typeface="Times New Roman" panose="02020603050405020304" pitchFamily="18" charset="0"/>
+              </a:rPr>
+              <a:t>DDD</a:t>
+            </a:r>
+            <a:r>
+              <a:rPr kumimoji="0" lang="zh-CN" altLang="en-US" sz="1200" b="0" i="0" u="none" strike="noStrike" cap="none" normalizeH="0" baseline="0" dirty="0">
+                <a:ln>
+                  <a:noFill/>
+                </a:ln>
+                <a:solidFill>
+                  <a:schemeClr val="tx1">
+                    <a:lumMod val="50000"/>
+                    <a:lumOff val="50000"/>
+                  </a:schemeClr>
+                </a:solidFill>
+                <a:effectLst/>
+                <a:latin typeface="等线" panose="02010600030101010101" pitchFamily="2" charset="-122"/>
+                <a:ea typeface="等线" panose="02010600030101010101" pitchFamily="2" charset="-122"/>
+                <a:cs typeface="Times New Roman" panose="02020603050405020304" pitchFamily="18" charset="0"/>
+              </a:rPr>
+              <a:t>的模型。</a:t>
+            </a:r>
+            <a:endParaRPr kumimoji="0" lang="zh-CN" altLang="en-US" sz="4000" b="0" i="0" u="none" strike="noStrike" cap="none" normalizeH="0" baseline="0" dirty="0">
+              <a:ln>
+                <a:noFill/>
+              </a:ln>
+              <a:solidFill>
+                <a:schemeClr val="tx1">
+                  <a:lumMod val="50000"/>
+                  <a:lumOff val="50000"/>
+                </a:schemeClr>
+              </a:solidFill>
+              <a:effectLst/>
+              <a:latin typeface="等线" panose="02010600030101010101" pitchFamily="2" charset="-122"/>
+              <a:ea typeface="等线" panose="02010600030101010101" pitchFamily="2" charset="-122"/>
+            </a:endParaRPr>
+          </a:p>
+        </p:txBody>
+      </p:sp>
+      <p:pic>
+        <p:nvPicPr>
+          <p:cNvPr id="1025" name="图片 1">
+            <a:extLst>
+              <a:ext uri="{FF2B5EF4-FFF2-40B4-BE49-F238E27FC236}">
+                <a16:creationId xmlns:a16="http://schemas.microsoft.com/office/drawing/2014/main" id="{A60B41C5-A0C6-699A-3712-16BE657FE335}"/>
+              </a:ext>
+            </a:extLst>
+          </p:cNvPr>
+          <p:cNvPicPr>
+            <a:picLocks noChangeAspect="1" noChangeArrowheads="1"/>
+          </p:cNvPicPr>
+          <p:nvPr/>
+        </p:nvPicPr>
+        <p:blipFill>
+          <a:blip r:embed="rId7">
+            <a:extLst>
+              <a:ext uri="{28A0092B-C50C-407E-A947-70E740481C1C}">
+                <a14:useLocalDpi xmlns:a14="http://schemas.microsoft.com/office/drawing/2010/main" val="0"/>
+              </a:ext>
+            </a:extLst>
+          </a:blip>
+          <a:srcRect/>
+          <a:stretch>
+            <a:fillRect/>
+          </a:stretch>
+        </p:blipFill>
+        <p:spPr bwMode="auto">
+          <a:xfrm>
+            <a:off x="2628144" y="5741929"/>
+            <a:ext cx="5429070" cy="482584"/>
+          </a:xfrm>
+          <a:prstGeom prst="rect">
+            <a:avLst/>
+          </a:prstGeom>
+          <a:noFill/>
+          <a:extLst>
+            <a:ext uri="{909E8E84-426E-40DD-AFC4-6F175D3DCCD1}">
+              <a14:hiddenFill xmlns:a14="http://schemas.microsoft.com/office/drawing/2010/main">
+                <a:solidFill>
+                  <a:srgbClr val="FFFFFF"/>
+                </a:solidFill>
+              </a14:hiddenFill>
+            </a:ext>
+          </a:extLst>
+        </p:spPr>
+      </p:pic>
     </p:spTree>
     <p:extLst>
       <p:ext uri="{BB962C8B-B14F-4D97-AF65-F5344CB8AC3E}">
@@ -47479,7 +48212,21 @@
                 <a:latin typeface="微软雅黑" panose="020B0503020204020204" pitchFamily="34" charset="-122"/>
                 <a:ea typeface="微软雅黑" panose="020B0503020204020204" pitchFamily="34" charset="-122"/>
               </a:rPr>
-              <a:t>），尽管这样，我们也只有事后两期的数据，且</a:t>
+              <a:t>），尽管这样，我们也只有</a:t>
+            </a:r>
+            <a:r>
+              <a:rPr lang="zh-CN" altLang="en-US" b="1" dirty="0">
+                <a:latin typeface="微软雅黑" panose="020B0503020204020204" pitchFamily="34" charset="-122"/>
+                <a:ea typeface="微软雅黑" panose="020B0503020204020204" pitchFamily="34" charset="-122"/>
+              </a:rPr>
+              <a:t>事后两期</a:t>
+            </a:r>
+            <a:r>
+              <a:rPr lang="zh-CN" altLang="en-US" dirty="0">
+                <a:latin typeface="微软雅黑" panose="020B0503020204020204" pitchFamily="34" charset="-122"/>
+                <a:ea typeface="微软雅黑" panose="020B0503020204020204" pitchFamily="34" charset="-122"/>
+              </a:rPr>
+              <a:t>的数据，且</a:t>
             </a:r>
             <a:r>
               <a:rPr lang="en-US" altLang="zh-CN" dirty="0">
@@ -47493,21 +48240,35 @@
                 <a:latin typeface="微软雅黑" panose="020B0503020204020204" pitchFamily="34" charset="-122"/>
                 <a:ea typeface="微软雅黑" panose="020B0503020204020204" pitchFamily="34" charset="-122"/>
               </a:rPr>
-              <a:t>年的数据缺的很多；事前取了</a:t>
-            </a:r>
-            <a:r>
-              <a:rPr lang="en-US" altLang="zh-CN" dirty="0">
+              <a:t>年的数据缺的很多；</a:t>
+            </a:r>
+            <a:r>
+              <a:rPr lang="zh-CN" altLang="en-US" b="1" dirty="0">
+                <a:latin typeface="微软雅黑" panose="020B0503020204020204" pitchFamily="34" charset="-122"/>
+                <a:ea typeface="微软雅黑" panose="020B0503020204020204" pitchFamily="34" charset="-122"/>
+              </a:rPr>
+              <a:t>事前取了</a:t>
+            </a:r>
+            <a:r>
+              <a:rPr lang="en-US" altLang="zh-CN" b="1" dirty="0">
                 <a:latin typeface="微软雅黑" panose="020B0503020204020204" pitchFamily="34" charset="-122"/>
                 <a:ea typeface="微软雅黑" panose="020B0503020204020204" pitchFamily="34" charset="-122"/>
               </a:rPr>
               <a:t>4</a:t>
             </a:r>
             <a:r>
+              <a:rPr lang="zh-CN" altLang="en-US" b="1" dirty="0">
+                <a:latin typeface="微软雅黑" panose="020B0503020204020204" pitchFamily="34" charset="-122"/>
+                <a:ea typeface="微软雅黑" panose="020B0503020204020204" pitchFamily="34" charset="-122"/>
+              </a:rPr>
+              <a:t>期</a:t>
+            </a:r>
+            <a:r>
               <a:rPr lang="zh-CN" altLang="en-US" dirty="0">
                 <a:latin typeface="微软雅黑" panose="020B0503020204020204" pitchFamily="34" charset="-122"/>
                 <a:ea typeface="微软雅黑" panose="020B0503020204020204" pitchFamily="34" charset="-122"/>
               </a:rPr>
-              <a:t>期，</a:t>
+              <a:t>，</a:t>
             </a:r>
             <a:r>
               <a:rPr lang="en-US" altLang="zh-CN" dirty="0">
